--- a/public/fun/pack/pptx/news/카드뉴스_25_오늘의한마디_연꽃연못.pptx
+++ b/public/fun/pack/pptx/news/카드뉴스_25_오늘의한마디_연꽃연못.pptx
@@ -3287,14 +3287,6 @@
 <file path=ppt/slides/slide1.xml><?xml version="1.0" encoding="utf-8"?>
 <p:sld xmlns:a="http://schemas.openxmlformats.org/drawingml/2006/main" xmlns:p="http://schemas.openxmlformats.org/presentationml/2006/main" xmlns:r="http://schemas.openxmlformats.org/officeDocument/2006/relationships">
   <p:cSld>
-    <p:bg>
-      <p:bgPr>
-        <a:solidFill>
-          <a:srgbClr val="7B3759"/>
-        </a:solidFill>
-        <a:effectLst/>
-      </p:bgPr>
-    </p:bg>
     <p:spTree>
       <p:nvGrpSpPr>
         <p:cNvPr id="1" name=""/>
@@ -3302,559 +3294,30 @@
         <p:nvPr/>
       </p:nvGrpSpPr>
       <p:grpSpPr/>
-      <p:sp>
-        <p:nvSpPr>
-          <p:cNvPr id="3" name="장식"/>
-          <p:cNvSpPr/>
+      <p:pic>
+        <p:nvPicPr>
+          <p:cNvPr id="3" name="표지 그림" descr="news-25.jpg"/>
+          <p:cNvPicPr>
+            <a:picLocks noChangeAspect="1"/>
+          </p:cNvPicPr>
           <p:nvPr/>
-        </p:nvSpPr>
-        <p:spPr>
-          <a:xfrm>
-            <a:off x="457200" y="457200"/>
-            <a:ext cx="5943600" cy="5943600"/>
-          </a:xfrm>
-          <a:prstGeom prst="roundRect">
-            <a:avLst>
-              <a:gd name="adj" fmla="val 5000"/>
-            </a:avLst>
-          </a:prstGeom>
-          <a:solidFill>
-            <a:srgbClr val="FFFFFF"/>
-          </a:solidFill>
-          <a:ln>
-            <a:noFill/>
-          </a:ln>
-        </p:spPr>
-        <p:txBody>
-          <a:bodyPr rtlCol="0" anchor="ctr"/>
-          <a:lstStyle/>
-          <a:p>
-            <a:pPr algn="ctr"/>
-          </a:p>
-        </p:txBody>
-      </p:sp>
-      <p:sp>
-        <p:nvSpPr>
-          <p:cNvPr id="4" name="장식"/>
-          <p:cNvSpPr/>
-          <p:nvPr/>
-        </p:nvSpPr>
-        <p:spPr>
-          <a:xfrm>
-            <a:off x="3225317" y="662482"/>
-            <a:ext cx="407365" cy="633679"/>
-          </a:xfrm>
-          <a:prstGeom prst="ellipse">
+        </p:nvPicPr>
+        <p:blipFill>
+          <a:blip r:embed="rId2"/>
+          <a:stretch>
+            <a:fillRect/>
+          </a:stretch>
+        </p:blipFill>
+        <p:spPr>
+          <a:xfrm>
+            <a:off x="0" y="0"/>
+            <a:ext cx="6858000" cy="6858000"/>
+          </a:xfrm>
+          <a:prstGeom prst="rect">
             <a:avLst/>
           </a:prstGeom>
-          <a:solidFill>
-            <a:srgbClr val="B8618C"/>
-          </a:solidFill>
-          <a:ln>
-            <a:noFill/>
-          </a:ln>
-        </p:spPr>
-        <p:txBody>
-          <a:bodyPr rtlCol="0" anchor="ctr"/>
-          <a:lstStyle/>
-          <a:p>
-            <a:pPr algn="ctr"/>
-          </a:p>
-        </p:txBody>
-      </p:sp>
-      <p:sp>
-        <p:nvSpPr>
-          <p:cNvPr id="5" name="장식"/>
-          <p:cNvSpPr/>
-          <p:nvPr/>
-        </p:nvSpPr>
-        <p:spPr>
-          <a:xfrm rot="4320000">
-            <a:off x="3598395" y="933539"/>
-            <a:ext cx="407365" cy="633679"/>
-          </a:xfrm>
-          <a:prstGeom prst="ellipse">
-            <a:avLst/>
-          </a:prstGeom>
-          <a:solidFill>
-            <a:srgbClr val="EED3E0"/>
-          </a:solidFill>
-          <a:ln>
-            <a:noFill/>
-          </a:ln>
-        </p:spPr>
-        <p:txBody>
-          <a:bodyPr rtlCol="0" anchor="ctr"/>
-          <a:lstStyle/>
-          <a:p>
-            <a:pPr algn="ctr"/>
-          </a:p>
-        </p:txBody>
-      </p:sp>
-      <p:sp>
-        <p:nvSpPr>
-          <p:cNvPr id="6" name="장식"/>
-          <p:cNvSpPr/>
-          <p:nvPr/>
-        </p:nvSpPr>
-        <p:spPr>
-          <a:xfrm rot="8640000">
-            <a:off x="3455892" y="1372119"/>
-            <a:ext cx="407365" cy="633679"/>
-          </a:xfrm>
-          <a:prstGeom prst="ellipse">
-            <a:avLst/>
-          </a:prstGeom>
-          <a:solidFill>
-            <a:srgbClr val="B8618C"/>
-          </a:solidFill>
-          <a:ln>
-            <a:noFill/>
-          </a:ln>
-        </p:spPr>
-        <p:txBody>
-          <a:bodyPr rtlCol="0" anchor="ctr"/>
-          <a:lstStyle/>
-          <a:p>
-            <a:pPr algn="ctr"/>
-          </a:p>
-        </p:txBody>
-      </p:sp>
-      <p:sp>
-        <p:nvSpPr>
-          <p:cNvPr id="7" name="장식"/>
-          <p:cNvSpPr/>
-          <p:nvPr/>
-        </p:nvSpPr>
-        <p:spPr>
-          <a:xfrm rot="12960000">
-            <a:off x="2994742" y="1372119"/>
-            <a:ext cx="407365" cy="633679"/>
-          </a:xfrm>
-          <a:prstGeom prst="ellipse">
-            <a:avLst/>
-          </a:prstGeom>
-          <a:solidFill>
-            <a:srgbClr val="EED3E0"/>
-          </a:solidFill>
-          <a:ln>
-            <a:noFill/>
-          </a:ln>
-        </p:spPr>
-        <p:txBody>
-          <a:bodyPr rtlCol="0" anchor="ctr"/>
-          <a:lstStyle/>
-          <a:p>
-            <a:pPr algn="ctr"/>
-          </a:p>
-        </p:txBody>
-      </p:sp>
-      <p:sp>
-        <p:nvSpPr>
-          <p:cNvPr id="8" name="장식"/>
-          <p:cNvSpPr/>
-          <p:nvPr/>
-        </p:nvSpPr>
-        <p:spPr>
-          <a:xfrm rot="17280000">
-            <a:off x="2852239" y="933539"/>
-            <a:ext cx="407365" cy="633679"/>
-          </a:xfrm>
-          <a:prstGeom prst="ellipse">
-            <a:avLst/>
-          </a:prstGeom>
-          <a:solidFill>
-            <a:srgbClr val="B8618C"/>
-          </a:solidFill>
-          <a:ln>
-            <a:noFill/>
-          </a:ln>
-        </p:spPr>
-        <p:txBody>
-          <a:bodyPr rtlCol="0" anchor="ctr"/>
-          <a:lstStyle/>
-          <a:p>
-            <a:pPr algn="ctr"/>
-          </a:p>
-        </p:txBody>
-      </p:sp>
-      <p:sp>
-        <p:nvSpPr>
-          <p:cNvPr id="9" name="장식"/>
-          <p:cNvSpPr/>
-          <p:nvPr/>
-        </p:nvSpPr>
-        <p:spPr>
-          <a:xfrm>
-            <a:off x="3293211" y="1235811"/>
-            <a:ext cx="271576" cy="271576"/>
-          </a:xfrm>
-          <a:prstGeom prst="ellipse">
-            <a:avLst/>
-          </a:prstGeom>
-          <a:solidFill>
-            <a:srgbClr val="3F8D3F"/>
-          </a:solidFill>
-          <a:ln>
-            <a:noFill/>
-          </a:ln>
-        </p:spPr>
-        <p:txBody>
-          <a:bodyPr rtlCol="0" anchor="ctr"/>
-          <a:lstStyle/>
-          <a:p>
-            <a:pPr algn="ctr"/>
-          </a:p>
-        </p:txBody>
-      </p:sp>
-      <p:sp>
-        <p:nvSpPr>
-          <p:cNvPr id="10" name="장식"/>
-          <p:cNvSpPr/>
-          <p:nvPr/>
-        </p:nvSpPr>
-        <p:spPr>
-          <a:xfrm rot="1200000">
-            <a:off x="2564424" y="1707812"/>
-            <a:ext cx="203682" cy="316839"/>
-          </a:xfrm>
-          <a:prstGeom prst="ellipse">
-            <a:avLst/>
-          </a:prstGeom>
-          <a:solidFill>
-            <a:srgbClr val="B8618C"/>
-          </a:solidFill>
-          <a:ln>
-            <a:noFill/>
-          </a:ln>
-        </p:spPr>
-        <p:txBody>
-          <a:bodyPr rtlCol="0" anchor="ctr"/>
-          <a:lstStyle/>
-          <a:p>
-            <a:pPr algn="ctr"/>
-          </a:p>
-        </p:txBody>
-      </p:sp>
-      <p:sp>
-        <p:nvSpPr>
-          <p:cNvPr id="11" name="장식"/>
-          <p:cNvSpPr/>
-          <p:nvPr/>
-        </p:nvSpPr>
-        <p:spPr>
-          <a:xfrm rot="5520000">
-            <a:off x="2693360" y="1898967"/>
-            <a:ext cx="203682" cy="316839"/>
-          </a:xfrm>
-          <a:prstGeom prst="ellipse">
-            <a:avLst/>
-          </a:prstGeom>
-          <a:solidFill>
-            <a:srgbClr val="EED3E0"/>
-          </a:solidFill>
-          <a:ln>
-            <a:noFill/>
-          </a:ln>
-        </p:spPr>
-        <p:txBody>
-          <a:bodyPr rtlCol="0" anchor="ctr"/>
-          <a:lstStyle/>
-          <a:p>
-            <a:pPr algn="ctr"/>
-          </a:p>
-        </p:txBody>
-      </p:sp>
-      <p:sp>
-        <p:nvSpPr>
-          <p:cNvPr id="12" name="장식"/>
-          <p:cNvSpPr/>
-          <p:nvPr/>
-        </p:nvSpPr>
-        <p:spPr>
-          <a:xfrm rot="9840000">
-            <a:off x="2551403" y="2080662"/>
-            <a:ext cx="203682" cy="316839"/>
-          </a:xfrm>
-          <a:prstGeom prst="ellipse">
-            <a:avLst/>
-          </a:prstGeom>
-          <a:solidFill>
-            <a:srgbClr val="B8618C"/>
-          </a:solidFill>
-          <a:ln>
-            <a:noFill/>
-          </a:ln>
-        </p:spPr>
-        <p:txBody>
-          <a:bodyPr rtlCol="0" anchor="ctr"/>
-          <a:lstStyle/>
-          <a:p>
-            <a:pPr algn="ctr"/>
-          </a:p>
-        </p:txBody>
-      </p:sp>
-      <p:sp>
-        <p:nvSpPr>
-          <p:cNvPr id="13" name="장식"/>
-          <p:cNvSpPr/>
-          <p:nvPr/>
-        </p:nvSpPr>
-        <p:spPr>
-          <a:xfrm rot="14160000">
-            <a:off x="2334734" y="2001801"/>
-            <a:ext cx="203682" cy="316839"/>
-          </a:xfrm>
-          <a:prstGeom prst="ellipse">
-            <a:avLst/>
-          </a:prstGeom>
-          <a:solidFill>
-            <a:srgbClr val="EED3E0"/>
-          </a:solidFill>
-          <a:ln>
-            <a:noFill/>
-          </a:ln>
-        </p:spPr>
-        <p:txBody>
-          <a:bodyPr rtlCol="0" anchor="ctr"/>
-          <a:lstStyle/>
-          <a:p>
-            <a:pPr algn="ctr"/>
-          </a:p>
-        </p:txBody>
-      </p:sp>
-      <p:sp>
-        <p:nvSpPr>
-          <p:cNvPr id="14" name="장식"/>
-          <p:cNvSpPr/>
-          <p:nvPr/>
-        </p:nvSpPr>
-        <p:spPr>
-          <a:xfrm rot="18480000">
-            <a:off x="2342781" y="1771367"/>
-            <a:ext cx="203682" cy="316839"/>
-          </a:xfrm>
-          <a:prstGeom prst="ellipse">
-            <a:avLst/>
-          </a:prstGeom>
-          <a:solidFill>
-            <a:srgbClr val="B8618C"/>
-          </a:solidFill>
-          <a:ln>
-            <a:noFill/>
-          </a:ln>
-        </p:spPr>
-        <p:txBody>
-          <a:bodyPr rtlCol="0" anchor="ctr"/>
-          <a:lstStyle/>
-          <a:p>
-            <a:pPr algn="ctr"/>
-          </a:p>
-        </p:txBody>
-      </p:sp>
-      <p:sp>
-        <p:nvSpPr>
-          <p:cNvPr id="15" name="장식"/>
-          <p:cNvSpPr/>
-          <p:nvPr/>
-        </p:nvSpPr>
-        <p:spPr>
-          <a:xfrm>
-            <a:off x="2531287" y="1982647"/>
-            <a:ext cx="135788" cy="135788"/>
-          </a:xfrm>
-          <a:prstGeom prst="ellipse">
-            <a:avLst/>
-          </a:prstGeom>
-          <a:solidFill>
-            <a:srgbClr val="3F8D3F"/>
-          </a:solidFill>
-          <a:ln>
-            <a:noFill/>
-          </a:ln>
-        </p:spPr>
-        <p:txBody>
-          <a:bodyPr rtlCol="0" anchor="ctr"/>
-          <a:lstStyle/>
-          <a:p>
-            <a:pPr algn="ctr"/>
-          </a:p>
-        </p:txBody>
-      </p:sp>
-      <p:sp>
-        <p:nvSpPr>
-          <p:cNvPr id="16" name="장식"/>
-          <p:cNvSpPr/>
-          <p:nvPr/>
-        </p:nvSpPr>
-        <p:spPr>
-          <a:xfrm rot="2400000">
-            <a:off x="4279174" y="1866696"/>
-            <a:ext cx="171093" cy="266145"/>
-          </a:xfrm>
-          <a:prstGeom prst="ellipse">
-            <a:avLst/>
-          </a:prstGeom>
-          <a:solidFill>
-            <a:srgbClr val="B8618C"/>
-          </a:solidFill>
-          <a:ln>
-            <a:noFill/>
-          </a:ln>
-        </p:spPr>
-        <p:txBody>
-          <a:bodyPr rtlCol="0" anchor="ctr"/>
-          <a:lstStyle/>
-          <a:p>
-            <a:pPr algn="ctr"/>
-          </a:p>
-        </p:txBody>
-      </p:sp>
-      <p:sp>
-        <p:nvSpPr>
-          <p:cNvPr id="17" name="장식"/>
-          <p:cNvSpPr/>
-          <p:nvPr/>
-        </p:nvSpPr>
-        <p:spPr>
-          <a:xfrm rot="6720000">
-            <a:off x="4326030" y="2054626"/>
-            <a:ext cx="171093" cy="266145"/>
-          </a:xfrm>
-          <a:prstGeom prst="ellipse">
-            <a:avLst/>
-          </a:prstGeom>
-          <a:solidFill>
-            <a:srgbClr val="EED3E0"/>
-          </a:solidFill>
-          <a:ln>
-            <a:noFill/>
-          </a:ln>
-        </p:spPr>
-        <p:txBody>
-          <a:bodyPr rtlCol="0" anchor="ctr"/>
-          <a:lstStyle/>
-          <a:p>
-            <a:pPr algn="ctr"/>
-          </a:p>
-        </p:txBody>
-      </p:sp>
-      <p:sp>
-        <p:nvSpPr>
-          <p:cNvPr id="18" name="장식"/>
-          <p:cNvSpPr/>
-          <p:nvPr/>
-        </p:nvSpPr>
-        <p:spPr>
-          <a:xfrm rot="11040000">
-            <a:off x="4161778" y="2157262"/>
-            <a:ext cx="171093" cy="266145"/>
-          </a:xfrm>
-          <a:prstGeom prst="ellipse">
-            <a:avLst/>
-          </a:prstGeom>
-          <a:solidFill>
-            <a:srgbClr val="B8618C"/>
-          </a:solidFill>
-          <a:ln>
-            <a:noFill/>
-          </a:ln>
-        </p:spPr>
-        <p:txBody>
-          <a:bodyPr rtlCol="0" anchor="ctr"/>
-          <a:lstStyle/>
-          <a:p>
-            <a:pPr algn="ctr"/>
-          </a:p>
-        </p:txBody>
-      </p:sp>
-      <p:sp>
-        <p:nvSpPr>
-          <p:cNvPr id="19" name="장식"/>
-          <p:cNvSpPr/>
-          <p:nvPr/>
-        </p:nvSpPr>
-        <p:spPr>
-          <a:xfrm rot="15360000">
-            <a:off x="4013408" y="2032765"/>
-            <a:ext cx="171093" cy="266145"/>
-          </a:xfrm>
-          <a:prstGeom prst="ellipse">
-            <a:avLst/>
-          </a:prstGeom>
-          <a:solidFill>
-            <a:srgbClr val="EED3E0"/>
-          </a:solidFill>
-          <a:ln>
-            <a:noFill/>
-          </a:ln>
-        </p:spPr>
-        <p:txBody>
-          <a:bodyPr rtlCol="0" anchor="ctr"/>
-          <a:lstStyle/>
-          <a:p>
-            <a:pPr algn="ctr"/>
-          </a:p>
-        </p:txBody>
-      </p:sp>
-      <p:sp>
-        <p:nvSpPr>
-          <p:cNvPr id="20" name="장식"/>
-          <p:cNvSpPr/>
-          <p:nvPr/>
-        </p:nvSpPr>
-        <p:spPr>
-          <a:xfrm rot="19680000">
-            <a:off x="4085963" y="1853185"/>
-            <a:ext cx="171093" cy="266145"/>
-          </a:xfrm>
-          <a:prstGeom prst="ellipse">
-            <a:avLst/>
-          </a:prstGeom>
-          <a:solidFill>
-            <a:srgbClr val="B8618C"/>
-          </a:solidFill>
-          <a:ln>
-            <a:noFill/>
-          </a:ln>
-        </p:spPr>
-        <p:txBody>
-          <a:bodyPr rtlCol="0" anchor="ctr"/>
-          <a:lstStyle/>
-          <a:p>
-            <a:pPr algn="ctr"/>
-          </a:p>
-        </p:txBody>
-      </p:sp>
-      <p:sp>
-        <p:nvSpPr>
-          <p:cNvPr id="21" name="장식"/>
-          <p:cNvSpPr/>
-          <p:nvPr/>
-        </p:nvSpPr>
-        <p:spPr>
-          <a:xfrm>
-            <a:off x="4201786" y="2068948"/>
-            <a:ext cx="114062" cy="114062"/>
-          </a:xfrm>
-          <a:prstGeom prst="ellipse">
-            <a:avLst/>
-          </a:prstGeom>
-          <a:solidFill>
-            <a:srgbClr val="3F8D3F"/>
-          </a:solidFill>
-          <a:ln>
-            <a:noFill/>
-          </a:ln>
-        </p:spPr>
-        <p:txBody>
-          <a:bodyPr rtlCol="0" anchor="ctr"/>
-          <a:lstStyle/>
-          <a:p>
-            <a:pPr algn="ctr"/>
-          </a:p>
-        </p:txBody>
-      </p:sp>
+        </p:spPr>
+      </p:pic>
       <p:sp>
         <p:nvSpPr>
           <p:cNvPr id="2" name="Title 1"/>
@@ -3867,8 +3330,8 @@
         </p:nvSpPr>
         <p:spPr>
           <a:xfrm>
-            <a:off x="822959" y="2263140"/>
-            <a:ext cx="5212080" cy="1371600"/>
+            <a:off x="685800" y="960120"/>
+            <a:ext cx="5486400" cy="1463040"/>
           </a:xfrm>
         </p:spPr>
         <p:txBody>
@@ -3877,7 +3340,7 @@
           </a:bodyPr>
           <a:lstStyle/>
           <a:p>
-            <a:pPr algn="ctr">
+            <a:pPr algn="l">
               <a:lnSpc>
                 <a:spcPct val="105000"/>
               </a:lnSpc>
@@ -3888,21 +3351,21 @@
                   <a:srgbClr val="7B3759"/>
                 </a:solidFill>
               </a:rPr>
-              <a:t>연꽃이 알려 주는 마음 다스리기</a:t>
-            </a:r>
-          </a:p>
-        </p:txBody>
-      </p:sp>
-      <p:sp>
-        <p:nvSpPr>
-          <p:cNvPr id="22" name="한 줄 문구"/>
+              <a:t>오늘은 일찍 자는 날로 정했습니다</a:t>
+            </a:r>
+          </a:p>
+        </p:txBody>
+      </p:sp>
+      <p:sp>
+        <p:nvSpPr>
+          <p:cNvPr id="4" name="한 줄 문구"/>
           <p:cNvSpPr txBox="1"/>
           <p:nvPr/>
         </p:nvSpPr>
         <p:spPr>
           <a:xfrm>
-            <a:off x="822959" y="3726180"/>
-            <a:ext cx="5212080" cy="822960"/>
+            <a:off x="685800" y="2560320"/>
+            <a:ext cx="5486400" cy="822960"/>
           </a:xfrm>
           <a:prstGeom prst="rect">
             <a:avLst/>
@@ -3915,7 +3378,7 @@
           </a:bodyPr>
           <a:lstStyle/>
           <a:p>
-            <a:pPr algn="ctr">
+            <a:pPr algn="l">
               <a:lnSpc>
                 <a:spcPct val="115000"/>
               </a:lnSpc>
@@ -3933,14 +3396,14 @@
       </p:sp>
       <p:sp>
         <p:nvSpPr>
-          <p:cNvPr id="23" name="안내 문구"/>
+          <p:cNvPr id="5" name="안내 문구"/>
           <p:cNvSpPr txBox="1"/>
           <p:nvPr/>
         </p:nvSpPr>
         <p:spPr>
           <a:xfrm>
-            <a:off x="822959" y="4594860"/>
-            <a:ext cx="5212080" cy="914400"/>
+            <a:off x="685800" y="3429000"/>
+            <a:ext cx="5486400" cy="914400"/>
           </a:xfrm>
           <a:prstGeom prst="rect">
             <a:avLst/>
@@ -3953,7 +3416,7 @@
           </a:bodyPr>
           <a:lstStyle/>
           <a:p>
-            <a:pPr algn="ctr">
+            <a:pPr algn="l">
               <a:lnSpc>
                 <a:spcPct val="115000"/>
               </a:lnSpc>
@@ -4028,528 +3491,6 @@
       </p:sp>
       <p:sp>
         <p:nvSpPr>
-          <p:cNvPr id="4" name="장식"/>
-          <p:cNvSpPr/>
-          <p:nvPr/>
-        </p:nvSpPr>
-        <p:spPr>
-          <a:xfrm>
-            <a:off x="5545836" y="530352"/>
-            <a:ext cx="246888" cy="384048"/>
-          </a:xfrm>
-          <a:prstGeom prst="ellipse">
-            <a:avLst/>
-          </a:prstGeom>
-          <a:solidFill>
-            <a:srgbClr val="B8618C"/>
-          </a:solidFill>
-          <a:ln>
-            <a:noFill/>
-          </a:ln>
-        </p:spPr>
-        <p:txBody>
-          <a:bodyPr rtlCol="0" anchor="ctr"/>
-          <a:lstStyle/>
-          <a:p>
-            <a:pPr algn="ctr"/>
-          </a:p>
-        </p:txBody>
-      </p:sp>
-      <p:sp>
-        <p:nvSpPr>
-          <p:cNvPr id="5" name="장식"/>
-          <p:cNvSpPr/>
-          <p:nvPr/>
-        </p:nvSpPr>
-        <p:spPr>
-          <a:xfrm rot="4320000">
-            <a:off x="5771943" y="694629"/>
-            <a:ext cx="246888" cy="384048"/>
-          </a:xfrm>
-          <a:prstGeom prst="ellipse">
-            <a:avLst/>
-          </a:prstGeom>
-          <a:solidFill>
-            <a:srgbClr val="EED3E0"/>
-          </a:solidFill>
-          <a:ln>
-            <a:noFill/>
-          </a:ln>
-        </p:spPr>
-        <p:txBody>
-          <a:bodyPr rtlCol="0" anchor="ctr"/>
-          <a:lstStyle/>
-          <a:p>
-            <a:pPr algn="ctr"/>
-          </a:p>
-        </p:txBody>
-      </p:sp>
-      <p:sp>
-        <p:nvSpPr>
-          <p:cNvPr id="6" name="장식"/>
-          <p:cNvSpPr/>
-          <p:nvPr/>
-        </p:nvSpPr>
-        <p:spPr>
-          <a:xfrm rot="8640000">
-            <a:off x="5685578" y="960434"/>
-            <a:ext cx="246888" cy="384048"/>
-          </a:xfrm>
-          <a:prstGeom prst="ellipse">
-            <a:avLst/>
-          </a:prstGeom>
-          <a:solidFill>
-            <a:srgbClr val="B8618C"/>
-          </a:solidFill>
-          <a:ln>
-            <a:noFill/>
-          </a:ln>
-        </p:spPr>
-        <p:txBody>
-          <a:bodyPr rtlCol="0" anchor="ctr"/>
-          <a:lstStyle/>
-          <a:p>
-            <a:pPr algn="ctr"/>
-          </a:p>
-        </p:txBody>
-      </p:sp>
-      <p:sp>
-        <p:nvSpPr>
-          <p:cNvPr id="7" name="장식"/>
-          <p:cNvSpPr/>
-          <p:nvPr/>
-        </p:nvSpPr>
-        <p:spPr>
-          <a:xfrm rot="12960000">
-            <a:off x="5406093" y="960434"/>
-            <a:ext cx="246888" cy="384048"/>
-          </a:xfrm>
-          <a:prstGeom prst="ellipse">
-            <a:avLst/>
-          </a:prstGeom>
-          <a:solidFill>
-            <a:srgbClr val="EED3E0"/>
-          </a:solidFill>
-          <a:ln>
-            <a:noFill/>
-          </a:ln>
-        </p:spPr>
-        <p:txBody>
-          <a:bodyPr rtlCol="0" anchor="ctr"/>
-          <a:lstStyle/>
-          <a:p>
-            <a:pPr algn="ctr"/>
-          </a:p>
-        </p:txBody>
-      </p:sp>
-      <p:sp>
-        <p:nvSpPr>
-          <p:cNvPr id="8" name="장식"/>
-          <p:cNvSpPr/>
-          <p:nvPr/>
-        </p:nvSpPr>
-        <p:spPr>
-          <a:xfrm rot="17280000">
-            <a:off x="5319728" y="694629"/>
-            <a:ext cx="246888" cy="384048"/>
-          </a:xfrm>
-          <a:prstGeom prst="ellipse">
-            <a:avLst/>
-          </a:prstGeom>
-          <a:solidFill>
-            <a:srgbClr val="B8618C"/>
-          </a:solidFill>
-          <a:ln>
-            <a:noFill/>
-          </a:ln>
-        </p:spPr>
-        <p:txBody>
-          <a:bodyPr rtlCol="0" anchor="ctr"/>
-          <a:lstStyle/>
-          <a:p>
-            <a:pPr algn="ctr"/>
-          </a:p>
-        </p:txBody>
-      </p:sp>
-      <p:sp>
-        <p:nvSpPr>
-          <p:cNvPr id="9" name="장식"/>
-          <p:cNvSpPr/>
-          <p:nvPr/>
-        </p:nvSpPr>
-        <p:spPr>
-          <a:xfrm>
-            <a:off x="5586984" y="877824"/>
-            <a:ext cx="164592" cy="164592"/>
-          </a:xfrm>
-          <a:prstGeom prst="ellipse">
-            <a:avLst/>
-          </a:prstGeom>
-          <a:solidFill>
-            <a:srgbClr val="3F8D3F"/>
-          </a:solidFill>
-          <a:ln>
-            <a:noFill/>
-          </a:ln>
-        </p:spPr>
-        <p:txBody>
-          <a:bodyPr rtlCol="0" anchor="ctr"/>
-          <a:lstStyle/>
-          <a:p>
-            <a:pPr algn="ctr"/>
-          </a:p>
-        </p:txBody>
-      </p:sp>
-      <p:sp>
-        <p:nvSpPr>
-          <p:cNvPr id="10" name="장식"/>
-          <p:cNvSpPr/>
-          <p:nvPr/>
-        </p:nvSpPr>
-        <p:spPr>
-          <a:xfrm rot="1200000">
-            <a:off x="5145294" y="1163884"/>
-            <a:ext cx="123444" cy="192024"/>
-          </a:xfrm>
-          <a:prstGeom prst="ellipse">
-            <a:avLst/>
-          </a:prstGeom>
-          <a:solidFill>
-            <a:srgbClr val="B8618C"/>
-          </a:solidFill>
-          <a:ln>
-            <a:noFill/>
-          </a:ln>
-        </p:spPr>
-        <p:txBody>
-          <a:bodyPr rtlCol="0" anchor="ctr"/>
-          <a:lstStyle/>
-          <a:p>
-            <a:pPr algn="ctr"/>
-          </a:p>
-        </p:txBody>
-      </p:sp>
-      <p:sp>
-        <p:nvSpPr>
-          <p:cNvPr id="11" name="장식"/>
-          <p:cNvSpPr/>
-          <p:nvPr/>
-        </p:nvSpPr>
-        <p:spPr>
-          <a:xfrm rot="5520000">
-            <a:off x="5223437" y="1279736"/>
-            <a:ext cx="123444" cy="192024"/>
-          </a:xfrm>
-          <a:prstGeom prst="ellipse">
-            <a:avLst/>
-          </a:prstGeom>
-          <a:solidFill>
-            <a:srgbClr val="EED3E0"/>
-          </a:solidFill>
-          <a:ln>
-            <a:noFill/>
-          </a:ln>
-        </p:spPr>
-        <p:txBody>
-          <a:bodyPr rtlCol="0" anchor="ctr"/>
-          <a:lstStyle/>
-          <a:p>
-            <a:pPr algn="ctr"/>
-          </a:p>
-        </p:txBody>
-      </p:sp>
-      <p:sp>
-        <p:nvSpPr>
-          <p:cNvPr id="12" name="장식"/>
-          <p:cNvSpPr/>
-          <p:nvPr/>
-        </p:nvSpPr>
-        <p:spPr>
-          <a:xfrm rot="9840000">
-            <a:off x="5137403" y="1389855"/>
-            <a:ext cx="123444" cy="192024"/>
-          </a:xfrm>
-          <a:prstGeom prst="ellipse">
-            <a:avLst/>
-          </a:prstGeom>
-          <a:solidFill>
-            <a:srgbClr val="B8618C"/>
-          </a:solidFill>
-          <a:ln>
-            <a:noFill/>
-          </a:ln>
-        </p:spPr>
-        <p:txBody>
-          <a:bodyPr rtlCol="0" anchor="ctr"/>
-          <a:lstStyle/>
-          <a:p>
-            <a:pPr algn="ctr"/>
-          </a:p>
-        </p:txBody>
-      </p:sp>
-      <p:sp>
-        <p:nvSpPr>
-          <p:cNvPr id="13" name="장식"/>
-          <p:cNvSpPr/>
-          <p:nvPr/>
-        </p:nvSpPr>
-        <p:spPr>
-          <a:xfrm rot="14160000">
-            <a:off x="5006088" y="1342060"/>
-            <a:ext cx="123444" cy="192024"/>
-          </a:xfrm>
-          <a:prstGeom prst="ellipse">
-            <a:avLst/>
-          </a:prstGeom>
-          <a:solidFill>
-            <a:srgbClr val="EED3E0"/>
-          </a:solidFill>
-          <a:ln>
-            <a:noFill/>
-          </a:ln>
-        </p:spPr>
-        <p:txBody>
-          <a:bodyPr rtlCol="0" anchor="ctr"/>
-          <a:lstStyle/>
-          <a:p>
-            <a:pPr algn="ctr"/>
-          </a:p>
-        </p:txBody>
-      </p:sp>
-      <p:sp>
-        <p:nvSpPr>
-          <p:cNvPr id="14" name="장식"/>
-          <p:cNvSpPr/>
-          <p:nvPr/>
-        </p:nvSpPr>
-        <p:spPr>
-          <a:xfrm rot="18480000">
-            <a:off x="5010965" y="1202403"/>
-            <a:ext cx="123444" cy="192024"/>
-          </a:xfrm>
-          <a:prstGeom prst="ellipse">
-            <a:avLst/>
-          </a:prstGeom>
-          <a:solidFill>
-            <a:srgbClr val="B8618C"/>
-          </a:solidFill>
-          <a:ln>
-            <a:noFill/>
-          </a:ln>
-        </p:spPr>
-        <p:txBody>
-          <a:bodyPr rtlCol="0" anchor="ctr"/>
-          <a:lstStyle/>
-          <a:p>
-            <a:pPr algn="ctr"/>
-          </a:p>
-        </p:txBody>
-      </p:sp>
-      <p:sp>
-        <p:nvSpPr>
-          <p:cNvPr id="15" name="장식"/>
-          <p:cNvSpPr/>
-          <p:nvPr/>
-        </p:nvSpPr>
-        <p:spPr>
-          <a:xfrm>
-            <a:off x="5125212" y="1330452"/>
-            <a:ext cx="82296" cy="82296"/>
-          </a:xfrm>
-          <a:prstGeom prst="ellipse">
-            <a:avLst/>
-          </a:prstGeom>
-          <a:solidFill>
-            <a:srgbClr val="3F8D3F"/>
-          </a:solidFill>
-          <a:ln>
-            <a:noFill/>
-          </a:ln>
-        </p:spPr>
-        <p:txBody>
-          <a:bodyPr rtlCol="0" anchor="ctr"/>
-          <a:lstStyle/>
-          <a:p>
-            <a:pPr algn="ctr"/>
-          </a:p>
-        </p:txBody>
-      </p:sp>
-      <p:sp>
-        <p:nvSpPr>
-          <p:cNvPr id="16" name="장식"/>
-          <p:cNvSpPr/>
-          <p:nvPr/>
-        </p:nvSpPr>
-        <p:spPr>
-          <a:xfrm rot="2400000">
-            <a:off x="6184537" y="1260178"/>
-            <a:ext cx="103692" cy="161300"/>
-          </a:xfrm>
-          <a:prstGeom prst="ellipse">
-            <a:avLst/>
-          </a:prstGeom>
-          <a:solidFill>
-            <a:srgbClr val="B8618C"/>
-          </a:solidFill>
-          <a:ln>
-            <a:noFill/>
-          </a:ln>
-        </p:spPr>
-        <p:txBody>
-          <a:bodyPr rtlCol="0" anchor="ctr"/>
-          <a:lstStyle/>
-          <a:p>
-            <a:pPr algn="ctr"/>
-          </a:p>
-        </p:txBody>
-      </p:sp>
-      <p:sp>
-        <p:nvSpPr>
-          <p:cNvPr id="17" name="장식"/>
-          <p:cNvSpPr/>
-          <p:nvPr/>
-        </p:nvSpPr>
-        <p:spPr>
-          <a:xfrm rot="6720000">
-            <a:off x="6212935" y="1374075"/>
-            <a:ext cx="103692" cy="161300"/>
-          </a:xfrm>
-          <a:prstGeom prst="ellipse">
-            <a:avLst/>
-          </a:prstGeom>
-          <a:solidFill>
-            <a:srgbClr val="EED3E0"/>
-          </a:solidFill>
-          <a:ln>
-            <a:noFill/>
-          </a:ln>
-        </p:spPr>
-        <p:txBody>
-          <a:bodyPr rtlCol="0" anchor="ctr"/>
-          <a:lstStyle/>
-          <a:p>
-            <a:pPr algn="ctr"/>
-          </a:p>
-        </p:txBody>
-      </p:sp>
-      <p:sp>
-        <p:nvSpPr>
-          <p:cNvPr id="18" name="장식"/>
-          <p:cNvSpPr/>
-          <p:nvPr/>
-        </p:nvSpPr>
-        <p:spPr>
-          <a:xfrm rot="11040000">
-            <a:off x="6113388" y="1436279"/>
-            <a:ext cx="103692" cy="161300"/>
-          </a:xfrm>
-          <a:prstGeom prst="ellipse">
-            <a:avLst/>
-          </a:prstGeom>
-          <a:solidFill>
-            <a:srgbClr val="B8618C"/>
-          </a:solidFill>
-          <a:ln>
-            <a:noFill/>
-          </a:ln>
-        </p:spPr>
-        <p:txBody>
-          <a:bodyPr rtlCol="0" anchor="ctr"/>
-          <a:lstStyle/>
-          <a:p>
-            <a:pPr algn="ctr"/>
-          </a:p>
-        </p:txBody>
-      </p:sp>
-      <p:sp>
-        <p:nvSpPr>
-          <p:cNvPr id="19" name="장식"/>
-          <p:cNvSpPr/>
-          <p:nvPr/>
-        </p:nvSpPr>
-        <p:spPr>
-          <a:xfrm rot="15360000">
-            <a:off x="6023467" y="1360826"/>
-            <a:ext cx="103692" cy="161300"/>
-          </a:xfrm>
-          <a:prstGeom prst="ellipse">
-            <a:avLst/>
-          </a:prstGeom>
-          <a:solidFill>
-            <a:srgbClr val="EED3E0"/>
-          </a:solidFill>
-          <a:ln>
-            <a:noFill/>
-          </a:ln>
-        </p:spPr>
-        <p:txBody>
-          <a:bodyPr rtlCol="0" anchor="ctr"/>
-          <a:lstStyle/>
-          <a:p>
-            <a:pPr algn="ctr"/>
-          </a:p>
-        </p:txBody>
-      </p:sp>
-      <p:sp>
-        <p:nvSpPr>
-          <p:cNvPr id="20" name="장식"/>
-          <p:cNvSpPr/>
-          <p:nvPr/>
-        </p:nvSpPr>
-        <p:spPr>
-          <a:xfrm rot="19680000">
-            <a:off x="6067439" y="1251990"/>
-            <a:ext cx="103692" cy="161300"/>
-          </a:xfrm>
-          <a:prstGeom prst="ellipse">
-            <a:avLst/>
-          </a:prstGeom>
-          <a:solidFill>
-            <a:srgbClr val="B8618C"/>
-          </a:solidFill>
-          <a:ln>
-            <a:noFill/>
-          </a:ln>
-        </p:spPr>
-        <p:txBody>
-          <a:bodyPr rtlCol="0" anchor="ctr"/>
-          <a:lstStyle/>
-          <a:p>
-            <a:pPr algn="ctr"/>
-          </a:p>
-        </p:txBody>
-      </p:sp>
-      <p:sp>
-        <p:nvSpPr>
-          <p:cNvPr id="21" name="장식"/>
-          <p:cNvSpPr/>
-          <p:nvPr/>
-        </p:nvSpPr>
-        <p:spPr>
-          <a:xfrm>
-            <a:off x="6137635" y="1382755"/>
-            <a:ext cx="69128" cy="69128"/>
-          </a:xfrm>
-          <a:prstGeom prst="ellipse">
-            <a:avLst/>
-          </a:prstGeom>
-          <a:solidFill>
-            <a:srgbClr val="3F8D3F"/>
-          </a:solidFill>
-          <a:ln>
-            <a:noFill/>
-          </a:ln>
-        </p:spPr>
-        <p:txBody>
-          <a:bodyPr rtlCol="0" anchor="ctr"/>
-          <a:lstStyle/>
-          <a:p>
-            <a:pPr algn="ctr"/>
-          </a:p>
-        </p:txBody>
-      </p:sp>
-      <p:sp>
-        <p:nvSpPr>
           <p:cNvPr id="2" name="Title 1"/>
           <p:cNvSpPr>
             <a:spLocks noGrp="1"/>
@@ -4581,14 +3522,14 @@
                   <a:srgbClr val="7B3759"/>
                 </a:solidFill>
               </a:rPr>
-              <a:t>천천히 가도 괜찮아요</a:t>
-            </a:r>
-          </a:p>
-        </p:txBody>
-      </p:sp>
-      <p:sp>
-        <p:nvSpPr>
-          <p:cNvPr id="22" name="번호"/>
+              <a:t>점심은 거르지 마세요</a:t>
+            </a:r>
+          </a:p>
+        </p:txBody>
+      </p:sp>
+      <p:sp>
+        <p:nvSpPr>
+          <p:cNvPr id="4" name="번호"/>
           <p:cNvSpPr txBox="1"/>
           <p:nvPr/>
         </p:nvSpPr>
@@ -4626,7 +3567,7 @@
       </p:sp>
       <p:sp>
         <p:nvSpPr>
-          <p:cNvPr id="23" name="본문"/>
+          <p:cNvPr id="5" name="본문"/>
           <p:cNvSpPr txBox="1"/>
           <p:nvPr/>
         </p:nvSpPr>
@@ -4657,14 +3598,14 @@
                   <a:srgbClr val="2B2B2B"/>
                 </a:solidFill>
               </a:rPr>
-              <a:t>오늘 하루도 충분히 잘하고 있어요.</a:t>
-            </a:r>
-          </a:p>
-        </p:txBody>
-      </p:sp>
-      <p:sp>
-        <p:nvSpPr>
-          <p:cNvPr id="24" name="쪽 번호"/>
+              <a:t>바빠도 한 끼는 앉아서 먹어요. 오후가 달라져요.</a:t>
+            </a:r>
+          </a:p>
+        </p:txBody>
+      </p:sp>
+      <p:sp>
+        <p:nvSpPr>
+          <p:cNvPr id="6" name="쪽 번호"/>
           <p:cNvSpPr txBox="1"/>
           <p:nvPr/>
         </p:nvSpPr>
@@ -4759,528 +3700,6 @@
       </p:sp>
       <p:sp>
         <p:nvSpPr>
-          <p:cNvPr id="4" name="장식"/>
-          <p:cNvSpPr/>
-          <p:nvPr/>
-        </p:nvSpPr>
-        <p:spPr>
-          <a:xfrm>
-            <a:off x="5545836" y="530352"/>
-            <a:ext cx="246888" cy="384048"/>
-          </a:xfrm>
-          <a:prstGeom prst="ellipse">
-            <a:avLst/>
-          </a:prstGeom>
-          <a:solidFill>
-            <a:srgbClr val="B8618C"/>
-          </a:solidFill>
-          <a:ln>
-            <a:noFill/>
-          </a:ln>
-        </p:spPr>
-        <p:txBody>
-          <a:bodyPr rtlCol="0" anchor="ctr"/>
-          <a:lstStyle/>
-          <a:p>
-            <a:pPr algn="ctr"/>
-          </a:p>
-        </p:txBody>
-      </p:sp>
-      <p:sp>
-        <p:nvSpPr>
-          <p:cNvPr id="5" name="장식"/>
-          <p:cNvSpPr/>
-          <p:nvPr/>
-        </p:nvSpPr>
-        <p:spPr>
-          <a:xfrm rot="4320000">
-            <a:off x="5771943" y="694629"/>
-            <a:ext cx="246888" cy="384048"/>
-          </a:xfrm>
-          <a:prstGeom prst="ellipse">
-            <a:avLst/>
-          </a:prstGeom>
-          <a:solidFill>
-            <a:srgbClr val="EED3E0"/>
-          </a:solidFill>
-          <a:ln>
-            <a:noFill/>
-          </a:ln>
-        </p:spPr>
-        <p:txBody>
-          <a:bodyPr rtlCol="0" anchor="ctr"/>
-          <a:lstStyle/>
-          <a:p>
-            <a:pPr algn="ctr"/>
-          </a:p>
-        </p:txBody>
-      </p:sp>
-      <p:sp>
-        <p:nvSpPr>
-          <p:cNvPr id="6" name="장식"/>
-          <p:cNvSpPr/>
-          <p:nvPr/>
-        </p:nvSpPr>
-        <p:spPr>
-          <a:xfrm rot="8640000">
-            <a:off x="5685578" y="960434"/>
-            <a:ext cx="246888" cy="384048"/>
-          </a:xfrm>
-          <a:prstGeom prst="ellipse">
-            <a:avLst/>
-          </a:prstGeom>
-          <a:solidFill>
-            <a:srgbClr val="B8618C"/>
-          </a:solidFill>
-          <a:ln>
-            <a:noFill/>
-          </a:ln>
-        </p:spPr>
-        <p:txBody>
-          <a:bodyPr rtlCol="0" anchor="ctr"/>
-          <a:lstStyle/>
-          <a:p>
-            <a:pPr algn="ctr"/>
-          </a:p>
-        </p:txBody>
-      </p:sp>
-      <p:sp>
-        <p:nvSpPr>
-          <p:cNvPr id="7" name="장식"/>
-          <p:cNvSpPr/>
-          <p:nvPr/>
-        </p:nvSpPr>
-        <p:spPr>
-          <a:xfrm rot="12960000">
-            <a:off x="5406093" y="960434"/>
-            <a:ext cx="246888" cy="384048"/>
-          </a:xfrm>
-          <a:prstGeom prst="ellipse">
-            <a:avLst/>
-          </a:prstGeom>
-          <a:solidFill>
-            <a:srgbClr val="EED3E0"/>
-          </a:solidFill>
-          <a:ln>
-            <a:noFill/>
-          </a:ln>
-        </p:spPr>
-        <p:txBody>
-          <a:bodyPr rtlCol="0" anchor="ctr"/>
-          <a:lstStyle/>
-          <a:p>
-            <a:pPr algn="ctr"/>
-          </a:p>
-        </p:txBody>
-      </p:sp>
-      <p:sp>
-        <p:nvSpPr>
-          <p:cNvPr id="8" name="장식"/>
-          <p:cNvSpPr/>
-          <p:nvPr/>
-        </p:nvSpPr>
-        <p:spPr>
-          <a:xfrm rot="17280000">
-            <a:off x="5319728" y="694629"/>
-            <a:ext cx="246888" cy="384048"/>
-          </a:xfrm>
-          <a:prstGeom prst="ellipse">
-            <a:avLst/>
-          </a:prstGeom>
-          <a:solidFill>
-            <a:srgbClr val="B8618C"/>
-          </a:solidFill>
-          <a:ln>
-            <a:noFill/>
-          </a:ln>
-        </p:spPr>
-        <p:txBody>
-          <a:bodyPr rtlCol="0" anchor="ctr"/>
-          <a:lstStyle/>
-          <a:p>
-            <a:pPr algn="ctr"/>
-          </a:p>
-        </p:txBody>
-      </p:sp>
-      <p:sp>
-        <p:nvSpPr>
-          <p:cNvPr id="9" name="장식"/>
-          <p:cNvSpPr/>
-          <p:nvPr/>
-        </p:nvSpPr>
-        <p:spPr>
-          <a:xfrm>
-            <a:off x="5586984" y="877824"/>
-            <a:ext cx="164592" cy="164592"/>
-          </a:xfrm>
-          <a:prstGeom prst="ellipse">
-            <a:avLst/>
-          </a:prstGeom>
-          <a:solidFill>
-            <a:srgbClr val="3F8D3F"/>
-          </a:solidFill>
-          <a:ln>
-            <a:noFill/>
-          </a:ln>
-        </p:spPr>
-        <p:txBody>
-          <a:bodyPr rtlCol="0" anchor="ctr"/>
-          <a:lstStyle/>
-          <a:p>
-            <a:pPr algn="ctr"/>
-          </a:p>
-        </p:txBody>
-      </p:sp>
-      <p:sp>
-        <p:nvSpPr>
-          <p:cNvPr id="10" name="장식"/>
-          <p:cNvSpPr/>
-          <p:nvPr/>
-        </p:nvSpPr>
-        <p:spPr>
-          <a:xfrm rot="1200000">
-            <a:off x="5145294" y="1163884"/>
-            <a:ext cx="123444" cy="192024"/>
-          </a:xfrm>
-          <a:prstGeom prst="ellipse">
-            <a:avLst/>
-          </a:prstGeom>
-          <a:solidFill>
-            <a:srgbClr val="B8618C"/>
-          </a:solidFill>
-          <a:ln>
-            <a:noFill/>
-          </a:ln>
-        </p:spPr>
-        <p:txBody>
-          <a:bodyPr rtlCol="0" anchor="ctr"/>
-          <a:lstStyle/>
-          <a:p>
-            <a:pPr algn="ctr"/>
-          </a:p>
-        </p:txBody>
-      </p:sp>
-      <p:sp>
-        <p:nvSpPr>
-          <p:cNvPr id="11" name="장식"/>
-          <p:cNvSpPr/>
-          <p:nvPr/>
-        </p:nvSpPr>
-        <p:spPr>
-          <a:xfrm rot="5520000">
-            <a:off x="5223437" y="1279736"/>
-            <a:ext cx="123444" cy="192024"/>
-          </a:xfrm>
-          <a:prstGeom prst="ellipse">
-            <a:avLst/>
-          </a:prstGeom>
-          <a:solidFill>
-            <a:srgbClr val="EED3E0"/>
-          </a:solidFill>
-          <a:ln>
-            <a:noFill/>
-          </a:ln>
-        </p:spPr>
-        <p:txBody>
-          <a:bodyPr rtlCol="0" anchor="ctr"/>
-          <a:lstStyle/>
-          <a:p>
-            <a:pPr algn="ctr"/>
-          </a:p>
-        </p:txBody>
-      </p:sp>
-      <p:sp>
-        <p:nvSpPr>
-          <p:cNvPr id="12" name="장식"/>
-          <p:cNvSpPr/>
-          <p:nvPr/>
-        </p:nvSpPr>
-        <p:spPr>
-          <a:xfrm rot="9840000">
-            <a:off x="5137403" y="1389855"/>
-            <a:ext cx="123444" cy="192024"/>
-          </a:xfrm>
-          <a:prstGeom prst="ellipse">
-            <a:avLst/>
-          </a:prstGeom>
-          <a:solidFill>
-            <a:srgbClr val="B8618C"/>
-          </a:solidFill>
-          <a:ln>
-            <a:noFill/>
-          </a:ln>
-        </p:spPr>
-        <p:txBody>
-          <a:bodyPr rtlCol="0" anchor="ctr"/>
-          <a:lstStyle/>
-          <a:p>
-            <a:pPr algn="ctr"/>
-          </a:p>
-        </p:txBody>
-      </p:sp>
-      <p:sp>
-        <p:nvSpPr>
-          <p:cNvPr id="13" name="장식"/>
-          <p:cNvSpPr/>
-          <p:nvPr/>
-        </p:nvSpPr>
-        <p:spPr>
-          <a:xfrm rot="14160000">
-            <a:off x="5006088" y="1342060"/>
-            <a:ext cx="123444" cy="192024"/>
-          </a:xfrm>
-          <a:prstGeom prst="ellipse">
-            <a:avLst/>
-          </a:prstGeom>
-          <a:solidFill>
-            <a:srgbClr val="EED3E0"/>
-          </a:solidFill>
-          <a:ln>
-            <a:noFill/>
-          </a:ln>
-        </p:spPr>
-        <p:txBody>
-          <a:bodyPr rtlCol="0" anchor="ctr"/>
-          <a:lstStyle/>
-          <a:p>
-            <a:pPr algn="ctr"/>
-          </a:p>
-        </p:txBody>
-      </p:sp>
-      <p:sp>
-        <p:nvSpPr>
-          <p:cNvPr id="14" name="장식"/>
-          <p:cNvSpPr/>
-          <p:nvPr/>
-        </p:nvSpPr>
-        <p:spPr>
-          <a:xfrm rot="18480000">
-            <a:off x="5010965" y="1202403"/>
-            <a:ext cx="123444" cy="192024"/>
-          </a:xfrm>
-          <a:prstGeom prst="ellipse">
-            <a:avLst/>
-          </a:prstGeom>
-          <a:solidFill>
-            <a:srgbClr val="B8618C"/>
-          </a:solidFill>
-          <a:ln>
-            <a:noFill/>
-          </a:ln>
-        </p:spPr>
-        <p:txBody>
-          <a:bodyPr rtlCol="0" anchor="ctr"/>
-          <a:lstStyle/>
-          <a:p>
-            <a:pPr algn="ctr"/>
-          </a:p>
-        </p:txBody>
-      </p:sp>
-      <p:sp>
-        <p:nvSpPr>
-          <p:cNvPr id="15" name="장식"/>
-          <p:cNvSpPr/>
-          <p:nvPr/>
-        </p:nvSpPr>
-        <p:spPr>
-          <a:xfrm>
-            <a:off x="5125212" y="1330452"/>
-            <a:ext cx="82296" cy="82296"/>
-          </a:xfrm>
-          <a:prstGeom prst="ellipse">
-            <a:avLst/>
-          </a:prstGeom>
-          <a:solidFill>
-            <a:srgbClr val="3F8D3F"/>
-          </a:solidFill>
-          <a:ln>
-            <a:noFill/>
-          </a:ln>
-        </p:spPr>
-        <p:txBody>
-          <a:bodyPr rtlCol="0" anchor="ctr"/>
-          <a:lstStyle/>
-          <a:p>
-            <a:pPr algn="ctr"/>
-          </a:p>
-        </p:txBody>
-      </p:sp>
-      <p:sp>
-        <p:nvSpPr>
-          <p:cNvPr id="16" name="장식"/>
-          <p:cNvSpPr/>
-          <p:nvPr/>
-        </p:nvSpPr>
-        <p:spPr>
-          <a:xfrm rot="2400000">
-            <a:off x="6184537" y="1260178"/>
-            <a:ext cx="103692" cy="161300"/>
-          </a:xfrm>
-          <a:prstGeom prst="ellipse">
-            <a:avLst/>
-          </a:prstGeom>
-          <a:solidFill>
-            <a:srgbClr val="B8618C"/>
-          </a:solidFill>
-          <a:ln>
-            <a:noFill/>
-          </a:ln>
-        </p:spPr>
-        <p:txBody>
-          <a:bodyPr rtlCol="0" anchor="ctr"/>
-          <a:lstStyle/>
-          <a:p>
-            <a:pPr algn="ctr"/>
-          </a:p>
-        </p:txBody>
-      </p:sp>
-      <p:sp>
-        <p:nvSpPr>
-          <p:cNvPr id="17" name="장식"/>
-          <p:cNvSpPr/>
-          <p:nvPr/>
-        </p:nvSpPr>
-        <p:spPr>
-          <a:xfrm rot="6720000">
-            <a:off x="6212935" y="1374075"/>
-            <a:ext cx="103692" cy="161300"/>
-          </a:xfrm>
-          <a:prstGeom prst="ellipse">
-            <a:avLst/>
-          </a:prstGeom>
-          <a:solidFill>
-            <a:srgbClr val="EED3E0"/>
-          </a:solidFill>
-          <a:ln>
-            <a:noFill/>
-          </a:ln>
-        </p:spPr>
-        <p:txBody>
-          <a:bodyPr rtlCol="0" anchor="ctr"/>
-          <a:lstStyle/>
-          <a:p>
-            <a:pPr algn="ctr"/>
-          </a:p>
-        </p:txBody>
-      </p:sp>
-      <p:sp>
-        <p:nvSpPr>
-          <p:cNvPr id="18" name="장식"/>
-          <p:cNvSpPr/>
-          <p:nvPr/>
-        </p:nvSpPr>
-        <p:spPr>
-          <a:xfrm rot="11040000">
-            <a:off x="6113388" y="1436279"/>
-            <a:ext cx="103692" cy="161300"/>
-          </a:xfrm>
-          <a:prstGeom prst="ellipse">
-            <a:avLst/>
-          </a:prstGeom>
-          <a:solidFill>
-            <a:srgbClr val="B8618C"/>
-          </a:solidFill>
-          <a:ln>
-            <a:noFill/>
-          </a:ln>
-        </p:spPr>
-        <p:txBody>
-          <a:bodyPr rtlCol="0" anchor="ctr"/>
-          <a:lstStyle/>
-          <a:p>
-            <a:pPr algn="ctr"/>
-          </a:p>
-        </p:txBody>
-      </p:sp>
-      <p:sp>
-        <p:nvSpPr>
-          <p:cNvPr id="19" name="장식"/>
-          <p:cNvSpPr/>
-          <p:nvPr/>
-        </p:nvSpPr>
-        <p:spPr>
-          <a:xfrm rot="15360000">
-            <a:off x="6023467" y="1360826"/>
-            <a:ext cx="103692" cy="161300"/>
-          </a:xfrm>
-          <a:prstGeom prst="ellipse">
-            <a:avLst/>
-          </a:prstGeom>
-          <a:solidFill>
-            <a:srgbClr val="EED3E0"/>
-          </a:solidFill>
-          <a:ln>
-            <a:noFill/>
-          </a:ln>
-        </p:spPr>
-        <p:txBody>
-          <a:bodyPr rtlCol="0" anchor="ctr"/>
-          <a:lstStyle/>
-          <a:p>
-            <a:pPr algn="ctr"/>
-          </a:p>
-        </p:txBody>
-      </p:sp>
-      <p:sp>
-        <p:nvSpPr>
-          <p:cNvPr id="20" name="장식"/>
-          <p:cNvSpPr/>
-          <p:nvPr/>
-        </p:nvSpPr>
-        <p:spPr>
-          <a:xfrm rot="19680000">
-            <a:off x="6067439" y="1251990"/>
-            <a:ext cx="103692" cy="161300"/>
-          </a:xfrm>
-          <a:prstGeom prst="ellipse">
-            <a:avLst/>
-          </a:prstGeom>
-          <a:solidFill>
-            <a:srgbClr val="B8618C"/>
-          </a:solidFill>
-          <a:ln>
-            <a:noFill/>
-          </a:ln>
-        </p:spPr>
-        <p:txBody>
-          <a:bodyPr rtlCol="0" anchor="ctr"/>
-          <a:lstStyle/>
-          <a:p>
-            <a:pPr algn="ctr"/>
-          </a:p>
-        </p:txBody>
-      </p:sp>
-      <p:sp>
-        <p:nvSpPr>
-          <p:cNvPr id="21" name="장식"/>
-          <p:cNvSpPr/>
-          <p:nvPr/>
-        </p:nvSpPr>
-        <p:spPr>
-          <a:xfrm>
-            <a:off x="6137635" y="1382755"/>
-            <a:ext cx="69128" cy="69128"/>
-          </a:xfrm>
-          <a:prstGeom prst="ellipse">
-            <a:avLst/>
-          </a:prstGeom>
-          <a:solidFill>
-            <a:srgbClr val="3F8D3F"/>
-          </a:solidFill>
-          <a:ln>
-            <a:noFill/>
-          </a:ln>
-        </p:spPr>
-        <p:txBody>
-          <a:bodyPr rtlCol="0" anchor="ctr"/>
-          <a:lstStyle/>
-          <a:p>
-            <a:pPr algn="ctr"/>
-          </a:p>
-        </p:txBody>
-      </p:sp>
-      <p:sp>
-        <p:nvSpPr>
           <p:cNvPr id="2" name="Title 1"/>
           <p:cNvSpPr>
             <a:spLocks noGrp="1"/>
@@ -5312,14 +3731,14 @@
                   <a:srgbClr val="7B3759"/>
                 </a:solidFill>
               </a:rPr>
-              <a:t>쉬어 가도 괜찮아요</a:t>
-            </a:r>
-          </a:p>
-        </p:txBody>
-      </p:sp>
-      <p:sp>
-        <p:nvSpPr>
-          <p:cNvPr id="22" name="번호"/>
+              <a:t>전화 한 통 걸어 보세요</a:t>
+            </a:r>
+          </a:p>
+        </p:txBody>
+      </p:sp>
+      <p:sp>
+        <p:nvSpPr>
+          <p:cNvPr id="4" name="번호"/>
           <p:cNvSpPr txBox="1"/>
           <p:nvPr/>
         </p:nvSpPr>
@@ -5357,7 +3776,7 @@
       </p:sp>
       <p:sp>
         <p:nvSpPr>
-          <p:cNvPr id="23" name="본문"/>
+          <p:cNvPr id="5" name="본문"/>
           <p:cNvSpPr txBox="1"/>
           <p:nvPr/>
         </p:nvSpPr>
@@ -5388,14 +3807,14 @@
                   <a:srgbClr val="2B2B2B"/>
                 </a:solidFill>
               </a:rPr>
-              <a:t>잠깐 멈추는 것도 앞으로 가는 방법이에요.</a:t>
-            </a:r>
-          </a:p>
-        </p:txBody>
-      </p:sp>
-      <p:sp>
-        <p:nvSpPr>
-          <p:cNvPr id="24" name="쪽 번호"/>
+              <a:t>문자보다 목소리가 먼저 떠오르는 사람이 있다면 지금 걸어 보세요.</a:t>
+            </a:r>
+          </a:p>
+        </p:txBody>
+      </p:sp>
+      <p:sp>
+        <p:nvSpPr>
+          <p:cNvPr id="6" name="쪽 번호"/>
           <p:cNvSpPr txBox="1"/>
           <p:nvPr/>
         </p:nvSpPr>
@@ -5490,528 +3909,6 @@
       </p:sp>
       <p:sp>
         <p:nvSpPr>
-          <p:cNvPr id="4" name="장식"/>
-          <p:cNvSpPr/>
-          <p:nvPr/>
-        </p:nvSpPr>
-        <p:spPr>
-          <a:xfrm>
-            <a:off x="5545836" y="530352"/>
-            <a:ext cx="246888" cy="384048"/>
-          </a:xfrm>
-          <a:prstGeom prst="ellipse">
-            <a:avLst/>
-          </a:prstGeom>
-          <a:solidFill>
-            <a:srgbClr val="B8618C"/>
-          </a:solidFill>
-          <a:ln>
-            <a:noFill/>
-          </a:ln>
-        </p:spPr>
-        <p:txBody>
-          <a:bodyPr rtlCol="0" anchor="ctr"/>
-          <a:lstStyle/>
-          <a:p>
-            <a:pPr algn="ctr"/>
-          </a:p>
-        </p:txBody>
-      </p:sp>
-      <p:sp>
-        <p:nvSpPr>
-          <p:cNvPr id="5" name="장식"/>
-          <p:cNvSpPr/>
-          <p:nvPr/>
-        </p:nvSpPr>
-        <p:spPr>
-          <a:xfrm rot="4320000">
-            <a:off x="5771943" y="694629"/>
-            <a:ext cx="246888" cy="384048"/>
-          </a:xfrm>
-          <a:prstGeom prst="ellipse">
-            <a:avLst/>
-          </a:prstGeom>
-          <a:solidFill>
-            <a:srgbClr val="EED3E0"/>
-          </a:solidFill>
-          <a:ln>
-            <a:noFill/>
-          </a:ln>
-        </p:spPr>
-        <p:txBody>
-          <a:bodyPr rtlCol="0" anchor="ctr"/>
-          <a:lstStyle/>
-          <a:p>
-            <a:pPr algn="ctr"/>
-          </a:p>
-        </p:txBody>
-      </p:sp>
-      <p:sp>
-        <p:nvSpPr>
-          <p:cNvPr id="6" name="장식"/>
-          <p:cNvSpPr/>
-          <p:nvPr/>
-        </p:nvSpPr>
-        <p:spPr>
-          <a:xfrm rot="8640000">
-            <a:off x="5685578" y="960434"/>
-            <a:ext cx="246888" cy="384048"/>
-          </a:xfrm>
-          <a:prstGeom prst="ellipse">
-            <a:avLst/>
-          </a:prstGeom>
-          <a:solidFill>
-            <a:srgbClr val="B8618C"/>
-          </a:solidFill>
-          <a:ln>
-            <a:noFill/>
-          </a:ln>
-        </p:spPr>
-        <p:txBody>
-          <a:bodyPr rtlCol="0" anchor="ctr"/>
-          <a:lstStyle/>
-          <a:p>
-            <a:pPr algn="ctr"/>
-          </a:p>
-        </p:txBody>
-      </p:sp>
-      <p:sp>
-        <p:nvSpPr>
-          <p:cNvPr id="7" name="장식"/>
-          <p:cNvSpPr/>
-          <p:nvPr/>
-        </p:nvSpPr>
-        <p:spPr>
-          <a:xfrm rot="12960000">
-            <a:off x="5406093" y="960434"/>
-            <a:ext cx="246888" cy="384048"/>
-          </a:xfrm>
-          <a:prstGeom prst="ellipse">
-            <a:avLst/>
-          </a:prstGeom>
-          <a:solidFill>
-            <a:srgbClr val="EED3E0"/>
-          </a:solidFill>
-          <a:ln>
-            <a:noFill/>
-          </a:ln>
-        </p:spPr>
-        <p:txBody>
-          <a:bodyPr rtlCol="0" anchor="ctr"/>
-          <a:lstStyle/>
-          <a:p>
-            <a:pPr algn="ctr"/>
-          </a:p>
-        </p:txBody>
-      </p:sp>
-      <p:sp>
-        <p:nvSpPr>
-          <p:cNvPr id="8" name="장식"/>
-          <p:cNvSpPr/>
-          <p:nvPr/>
-        </p:nvSpPr>
-        <p:spPr>
-          <a:xfrm rot="17280000">
-            <a:off x="5319728" y="694629"/>
-            <a:ext cx="246888" cy="384048"/>
-          </a:xfrm>
-          <a:prstGeom prst="ellipse">
-            <a:avLst/>
-          </a:prstGeom>
-          <a:solidFill>
-            <a:srgbClr val="B8618C"/>
-          </a:solidFill>
-          <a:ln>
-            <a:noFill/>
-          </a:ln>
-        </p:spPr>
-        <p:txBody>
-          <a:bodyPr rtlCol="0" anchor="ctr"/>
-          <a:lstStyle/>
-          <a:p>
-            <a:pPr algn="ctr"/>
-          </a:p>
-        </p:txBody>
-      </p:sp>
-      <p:sp>
-        <p:nvSpPr>
-          <p:cNvPr id="9" name="장식"/>
-          <p:cNvSpPr/>
-          <p:nvPr/>
-        </p:nvSpPr>
-        <p:spPr>
-          <a:xfrm>
-            <a:off x="5586984" y="877824"/>
-            <a:ext cx="164592" cy="164592"/>
-          </a:xfrm>
-          <a:prstGeom prst="ellipse">
-            <a:avLst/>
-          </a:prstGeom>
-          <a:solidFill>
-            <a:srgbClr val="3F8D3F"/>
-          </a:solidFill>
-          <a:ln>
-            <a:noFill/>
-          </a:ln>
-        </p:spPr>
-        <p:txBody>
-          <a:bodyPr rtlCol="0" anchor="ctr"/>
-          <a:lstStyle/>
-          <a:p>
-            <a:pPr algn="ctr"/>
-          </a:p>
-        </p:txBody>
-      </p:sp>
-      <p:sp>
-        <p:nvSpPr>
-          <p:cNvPr id="10" name="장식"/>
-          <p:cNvSpPr/>
-          <p:nvPr/>
-        </p:nvSpPr>
-        <p:spPr>
-          <a:xfrm rot="1200000">
-            <a:off x="5145294" y="1163884"/>
-            <a:ext cx="123444" cy="192024"/>
-          </a:xfrm>
-          <a:prstGeom prst="ellipse">
-            <a:avLst/>
-          </a:prstGeom>
-          <a:solidFill>
-            <a:srgbClr val="B8618C"/>
-          </a:solidFill>
-          <a:ln>
-            <a:noFill/>
-          </a:ln>
-        </p:spPr>
-        <p:txBody>
-          <a:bodyPr rtlCol="0" anchor="ctr"/>
-          <a:lstStyle/>
-          <a:p>
-            <a:pPr algn="ctr"/>
-          </a:p>
-        </p:txBody>
-      </p:sp>
-      <p:sp>
-        <p:nvSpPr>
-          <p:cNvPr id="11" name="장식"/>
-          <p:cNvSpPr/>
-          <p:nvPr/>
-        </p:nvSpPr>
-        <p:spPr>
-          <a:xfrm rot="5520000">
-            <a:off x="5223437" y="1279736"/>
-            <a:ext cx="123444" cy="192024"/>
-          </a:xfrm>
-          <a:prstGeom prst="ellipse">
-            <a:avLst/>
-          </a:prstGeom>
-          <a:solidFill>
-            <a:srgbClr val="EED3E0"/>
-          </a:solidFill>
-          <a:ln>
-            <a:noFill/>
-          </a:ln>
-        </p:spPr>
-        <p:txBody>
-          <a:bodyPr rtlCol="0" anchor="ctr"/>
-          <a:lstStyle/>
-          <a:p>
-            <a:pPr algn="ctr"/>
-          </a:p>
-        </p:txBody>
-      </p:sp>
-      <p:sp>
-        <p:nvSpPr>
-          <p:cNvPr id="12" name="장식"/>
-          <p:cNvSpPr/>
-          <p:nvPr/>
-        </p:nvSpPr>
-        <p:spPr>
-          <a:xfrm rot="9840000">
-            <a:off x="5137403" y="1389855"/>
-            <a:ext cx="123444" cy="192024"/>
-          </a:xfrm>
-          <a:prstGeom prst="ellipse">
-            <a:avLst/>
-          </a:prstGeom>
-          <a:solidFill>
-            <a:srgbClr val="B8618C"/>
-          </a:solidFill>
-          <a:ln>
-            <a:noFill/>
-          </a:ln>
-        </p:spPr>
-        <p:txBody>
-          <a:bodyPr rtlCol="0" anchor="ctr"/>
-          <a:lstStyle/>
-          <a:p>
-            <a:pPr algn="ctr"/>
-          </a:p>
-        </p:txBody>
-      </p:sp>
-      <p:sp>
-        <p:nvSpPr>
-          <p:cNvPr id="13" name="장식"/>
-          <p:cNvSpPr/>
-          <p:nvPr/>
-        </p:nvSpPr>
-        <p:spPr>
-          <a:xfrm rot="14160000">
-            <a:off x="5006088" y="1342060"/>
-            <a:ext cx="123444" cy="192024"/>
-          </a:xfrm>
-          <a:prstGeom prst="ellipse">
-            <a:avLst/>
-          </a:prstGeom>
-          <a:solidFill>
-            <a:srgbClr val="EED3E0"/>
-          </a:solidFill>
-          <a:ln>
-            <a:noFill/>
-          </a:ln>
-        </p:spPr>
-        <p:txBody>
-          <a:bodyPr rtlCol="0" anchor="ctr"/>
-          <a:lstStyle/>
-          <a:p>
-            <a:pPr algn="ctr"/>
-          </a:p>
-        </p:txBody>
-      </p:sp>
-      <p:sp>
-        <p:nvSpPr>
-          <p:cNvPr id="14" name="장식"/>
-          <p:cNvSpPr/>
-          <p:nvPr/>
-        </p:nvSpPr>
-        <p:spPr>
-          <a:xfrm rot="18480000">
-            <a:off x="5010965" y="1202403"/>
-            <a:ext cx="123444" cy="192024"/>
-          </a:xfrm>
-          <a:prstGeom prst="ellipse">
-            <a:avLst/>
-          </a:prstGeom>
-          <a:solidFill>
-            <a:srgbClr val="B8618C"/>
-          </a:solidFill>
-          <a:ln>
-            <a:noFill/>
-          </a:ln>
-        </p:spPr>
-        <p:txBody>
-          <a:bodyPr rtlCol="0" anchor="ctr"/>
-          <a:lstStyle/>
-          <a:p>
-            <a:pPr algn="ctr"/>
-          </a:p>
-        </p:txBody>
-      </p:sp>
-      <p:sp>
-        <p:nvSpPr>
-          <p:cNvPr id="15" name="장식"/>
-          <p:cNvSpPr/>
-          <p:nvPr/>
-        </p:nvSpPr>
-        <p:spPr>
-          <a:xfrm>
-            <a:off x="5125212" y="1330452"/>
-            <a:ext cx="82296" cy="82296"/>
-          </a:xfrm>
-          <a:prstGeom prst="ellipse">
-            <a:avLst/>
-          </a:prstGeom>
-          <a:solidFill>
-            <a:srgbClr val="3F8D3F"/>
-          </a:solidFill>
-          <a:ln>
-            <a:noFill/>
-          </a:ln>
-        </p:spPr>
-        <p:txBody>
-          <a:bodyPr rtlCol="0" anchor="ctr"/>
-          <a:lstStyle/>
-          <a:p>
-            <a:pPr algn="ctr"/>
-          </a:p>
-        </p:txBody>
-      </p:sp>
-      <p:sp>
-        <p:nvSpPr>
-          <p:cNvPr id="16" name="장식"/>
-          <p:cNvSpPr/>
-          <p:nvPr/>
-        </p:nvSpPr>
-        <p:spPr>
-          <a:xfrm rot="2400000">
-            <a:off x="6184537" y="1260178"/>
-            <a:ext cx="103692" cy="161300"/>
-          </a:xfrm>
-          <a:prstGeom prst="ellipse">
-            <a:avLst/>
-          </a:prstGeom>
-          <a:solidFill>
-            <a:srgbClr val="B8618C"/>
-          </a:solidFill>
-          <a:ln>
-            <a:noFill/>
-          </a:ln>
-        </p:spPr>
-        <p:txBody>
-          <a:bodyPr rtlCol="0" anchor="ctr"/>
-          <a:lstStyle/>
-          <a:p>
-            <a:pPr algn="ctr"/>
-          </a:p>
-        </p:txBody>
-      </p:sp>
-      <p:sp>
-        <p:nvSpPr>
-          <p:cNvPr id="17" name="장식"/>
-          <p:cNvSpPr/>
-          <p:nvPr/>
-        </p:nvSpPr>
-        <p:spPr>
-          <a:xfrm rot="6720000">
-            <a:off x="6212935" y="1374075"/>
-            <a:ext cx="103692" cy="161300"/>
-          </a:xfrm>
-          <a:prstGeom prst="ellipse">
-            <a:avLst/>
-          </a:prstGeom>
-          <a:solidFill>
-            <a:srgbClr val="EED3E0"/>
-          </a:solidFill>
-          <a:ln>
-            <a:noFill/>
-          </a:ln>
-        </p:spPr>
-        <p:txBody>
-          <a:bodyPr rtlCol="0" anchor="ctr"/>
-          <a:lstStyle/>
-          <a:p>
-            <a:pPr algn="ctr"/>
-          </a:p>
-        </p:txBody>
-      </p:sp>
-      <p:sp>
-        <p:nvSpPr>
-          <p:cNvPr id="18" name="장식"/>
-          <p:cNvSpPr/>
-          <p:nvPr/>
-        </p:nvSpPr>
-        <p:spPr>
-          <a:xfrm rot="11040000">
-            <a:off x="6113388" y="1436279"/>
-            <a:ext cx="103692" cy="161300"/>
-          </a:xfrm>
-          <a:prstGeom prst="ellipse">
-            <a:avLst/>
-          </a:prstGeom>
-          <a:solidFill>
-            <a:srgbClr val="B8618C"/>
-          </a:solidFill>
-          <a:ln>
-            <a:noFill/>
-          </a:ln>
-        </p:spPr>
-        <p:txBody>
-          <a:bodyPr rtlCol="0" anchor="ctr"/>
-          <a:lstStyle/>
-          <a:p>
-            <a:pPr algn="ctr"/>
-          </a:p>
-        </p:txBody>
-      </p:sp>
-      <p:sp>
-        <p:nvSpPr>
-          <p:cNvPr id="19" name="장식"/>
-          <p:cNvSpPr/>
-          <p:nvPr/>
-        </p:nvSpPr>
-        <p:spPr>
-          <a:xfrm rot="15360000">
-            <a:off x="6023467" y="1360826"/>
-            <a:ext cx="103692" cy="161300"/>
-          </a:xfrm>
-          <a:prstGeom prst="ellipse">
-            <a:avLst/>
-          </a:prstGeom>
-          <a:solidFill>
-            <a:srgbClr val="EED3E0"/>
-          </a:solidFill>
-          <a:ln>
-            <a:noFill/>
-          </a:ln>
-        </p:spPr>
-        <p:txBody>
-          <a:bodyPr rtlCol="0" anchor="ctr"/>
-          <a:lstStyle/>
-          <a:p>
-            <a:pPr algn="ctr"/>
-          </a:p>
-        </p:txBody>
-      </p:sp>
-      <p:sp>
-        <p:nvSpPr>
-          <p:cNvPr id="20" name="장식"/>
-          <p:cNvSpPr/>
-          <p:nvPr/>
-        </p:nvSpPr>
-        <p:spPr>
-          <a:xfrm rot="19680000">
-            <a:off x="6067439" y="1251990"/>
-            <a:ext cx="103692" cy="161300"/>
-          </a:xfrm>
-          <a:prstGeom prst="ellipse">
-            <a:avLst/>
-          </a:prstGeom>
-          <a:solidFill>
-            <a:srgbClr val="B8618C"/>
-          </a:solidFill>
-          <a:ln>
-            <a:noFill/>
-          </a:ln>
-        </p:spPr>
-        <p:txBody>
-          <a:bodyPr rtlCol="0" anchor="ctr"/>
-          <a:lstStyle/>
-          <a:p>
-            <a:pPr algn="ctr"/>
-          </a:p>
-        </p:txBody>
-      </p:sp>
-      <p:sp>
-        <p:nvSpPr>
-          <p:cNvPr id="21" name="장식"/>
-          <p:cNvSpPr/>
-          <p:nvPr/>
-        </p:nvSpPr>
-        <p:spPr>
-          <a:xfrm>
-            <a:off x="6137635" y="1382755"/>
-            <a:ext cx="69128" cy="69128"/>
-          </a:xfrm>
-          <a:prstGeom prst="ellipse">
-            <a:avLst/>
-          </a:prstGeom>
-          <a:solidFill>
-            <a:srgbClr val="3F8D3F"/>
-          </a:solidFill>
-          <a:ln>
-            <a:noFill/>
-          </a:ln>
-        </p:spPr>
-        <p:txBody>
-          <a:bodyPr rtlCol="0" anchor="ctr"/>
-          <a:lstStyle/>
-          <a:p>
-            <a:pPr algn="ctr"/>
-          </a:p>
-        </p:txBody>
-      </p:sp>
-      <p:sp>
-        <p:nvSpPr>
           <p:cNvPr id="2" name="Title 1"/>
           <p:cNvSpPr>
             <a:spLocks noGrp="1"/>
@@ -6043,14 +3940,14 @@
                   <a:srgbClr val="7B3759"/>
                 </a:solidFill>
               </a:rPr>
-              <a:t>이미 잘하고 있어요</a:t>
-            </a:r>
-          </a:p>
-        </p:txBody>
-      </p:sp>
-      <p:sp>
-        <p:nvSpPr>
-          <p:cNvPr id="22" name="번호"/>
+              <a:t>메모 한 장 남기기</a:t>
+            </a:r>
+          </a:p>
+        </p:txBody>
+      </p:sp>
+      <p:sp>
+        <p:nvSpPr>
+          <p:cNvPr id="4" name="번호"/>
           <p:cNvSpPr txBox="1"/>
           <p:nvPr/>
         </p:nvSpPr>
@@ -6088,7 +3985,7 @@
       </p:sp>
       <p:sp>
         <p:nvSpPr>
-          <p:cNvPr id="23" name="본문"/>
+          <p:cNvPr id="5" name="본문"/>
           <p:cNvSpPr txBox="1"/>
           <p:nvPr/>
         </p:nvSpPr>
@@ -6119,14 +4016,14 @@
                   <a:srgbClr val="2B2B2B"/>
                 </a:solidFill>
               </a:rPr>
-              <a:t>남과 비교하지 말고 어제의 나와 비교해 보세요.</a:t>
-            </a:r>
-          </a:p>
-        </p:txBody>
-      </p:sp>
-      <p:sp>
-        <p:nvSpPr>
-          <p:cNvPr id="24" name="쪽 번호"/>
+              <a:t>생각났을 때 적어 두면 다음 주의 내가 고마워해요.</a:t>
+            </a:r>
+          </a:p>
+        </p:txBody>
+      </p:sp>
+      <p:sp>
+        <p:nvSpPr>
+          <p:cNvPr id="6" name="쪽 번호"/>
           <p:cNvSpPr txBox="1"/>
           <p:nvPr/>
         </p:nvSpPr>
@@ -6221,528 +4118,6 @@
       </p:sp>
       <p:sp>
         <p:nvSpPr>
-          <p:cNvPr id="4" name="장식"/>
-          <p:cNvSpPr/>
-          <p:nvPr/>
-        </p:nvSpPr>
-        <p:spPr>
-          <a:xfrm>
-            <a:off x="5545836" y="530352"/>
-            <a:ext cx="246888" cy="384048"/>
-          </a:xfrm>
-          <a:prstGeom prst="ellipse">
-            <a:avLst/>
-          </a:prstGeom>
-          <a:solidFill>
-            <a:srgbClr val="B8618C"/>
-          </a:solidFill>
-          <a:ln>
-            <a:noFill/>
-          </a:ln>
-        </p:spPr>
-        <p:txBody>
-          <a:bodyPr rtlCol="0" anchor="ctr"/>
-          <a:lstStyle/>
-          <a:p>
-            <a:pPr algn="ctr"/>
-          </a:p>
-        </p:txBody>
-      </p:sp>
-      <p:sp>
-        <p:nvSpPr>
-          <p:cNvPr id="5" name="장식"/>
-          <p:cNvSpPr/>
-          <p:nvPr/>
-        </p:nvSpPr>
-        <p:spPr>
-          <a:xfrm rot="4320000">
-            <a:off x="5771943" y="694629"/>
-            <a:ext cx="246888" cy="384048"/>
-          </a:xfrm>
-          <a:prstGeom prst="ellipse">
-            <a:avLst/>
-          </a:prstGeom>
-          <a:solidFill>
-            <a:srgbClr val="EED3E0"/>
-          </a:solidFill>
-          <a:ln>
-            <a:noFill/>
-          </a:ln>
-        </p:spPr>
-        <p:txBody>
-          <a:bodyPr rtlCol="0" anchor="ctr"/>
-          <a:lstStyle/>
-          <a:p>
-            <a:pPr algn="ctr"/>
-          </a:p>
-        </p:txBody>
-      </p:sp>
-      <p:sp>
-        <p:nvSpPr>
-          <p:cNvPr id="6" name="장식"/>
-          <p:cNvSpPr/>
-          <p:nvPr/>
-        </p:nvSpPr>
-        <p:spPr>
-          <a:xfrm rot="8640000">
-            <a:off x="5685578" y="960434"/>
-            <a:ext cx="246888" cy="384048"/>
-          </a:xfrm>
-          <a:prstGeom prst="ellipse">
-            <a:avLst/>
-          </a:prstGeom>
-          <a:solidFill>
-            <a:srgbClr val="B8618C"/>
-          </a:solidFill>
-          <a:ln>
-            <a:noFill/>
-          </a:ln>
-        </p:spPr>
-        <p:txBody>
-          <a:bodyPr rtlCol="0" anchor="ctr"/>
-          <a:lstStyle/>
-          <a:p>
-            <a:pPr algn="ctr"/>
-          </a:p>
-        </p:txBody>
-      </p:sp>
-      <p:sp>
-        <p:nvSpPr>
-          <p:cNvPr id="7" name="장식"/>
-          <p:cNvSpPr/>
-          <p:nvPr/>
-        </p:nvSpPr>
-        <p:spPr>
-          <a:xfrm rot="12960000">
-            <a:off x="5406093" y="960434"/>
-            <a:ext cx="246888" cy="384048"/>
-          </a:xfrm>
-          <a:prstGeom prst="ellipse">
-            <a:avLst/>
-          </a:prstGeom>
-          <a:solidFill>
-            <a:srgbClr val="EED3E0"/>
-          </a:solidFill>
-          <a:ln>
-            <a:noFill/>
-          </a:ln>
-        </p:spPr>
-        <p:txBody>
-          <a:bodyPr rtlCol="0" anchor="ctr"/>
-          <a:lstStyle/>
-          <a:p>
-            <a:pPr algn="ctr"/>
-          </a:p>
-        </p:txBody>
-      </p:sp>
-      <p:sp>
-        <p:nvSpPr>
-          <p:cNvPr id="8" name="장식"/>
-          <p:cNvSpPr/>
-          <p:nvPr/>
-        </p:nvSpPr>
-        <p:spPr>
-          <a:xfrm rot="17280000">
-            <a:off x="5319728" y="694629"/>
-            <a:ext cx="246888" cy="384048"/>
-          </a:xfrm>
-          <a:prstGeom prst="ellipse">
-            <a:avLst/>
-          </a:prstGeom>
-          <a:solidFill>
-            <a:srgbClr val="B8618C"/>
-          </a:solidFill>
-          <a:ln>
-            <a:noFill/>
-          </a:ln>
-        </p:spPr>
-        <p:txBody>
-          <a:bodyPr rtlCol="0" anchor="ctr"/>
-          <a:lstStyle/>
-          <a:p>
-            <a:pPr algn="ctr"/>
-          </a:p>
-        </p:txBody>
-      </p:sp>
-      <p:sp>
-        <p:nvSpPr>
-          <p:cNvPr id="9" name="장식"/>
-          <p:cNvSpPr/>
-          <p:nvPr/>
-        </p:nvSpPr>
-        <p:spPr>
-          <a:xfrm>
-            <a:off x="5586984" y="877824"/>
-            <a:ext cx="164592" cy="164592"/>
-          </a:xfrm>
-          <a:prstGeom prst="ellipse">
-            <a:avLst/>
-          </a:prstGeom>
-          <a:solidFill>
-            <a:srgbClr val="3F8D3F"/>
-          </a:solidFill>
-          <a:ln>
-            <a:noFill/>
-          </a:ln>
-        </p:spPr>
-        <p:txBody>
-          <a:bodyPr rtlCol="0" anchor="ctr"/>
-          <a:lstStyle/>
-          <a:p>
-            <a:pPr algn="ctr"/>
-          </a:p>
-        </p:txBody>
-      </p:sp>
-      <p:sp>
-        <p:nvSpPr>
-          <p:cNvPr id="10" name="장식"/>
-          <p:cNvSpPr/>
-          <p:nvPr/>
-        </p:nvSpPr>
-        <p:spPr>
-          <a:xfrm rot="1200000">
-            <a:off x="5145294" y="1163884"/>
-            <a:ext cx="123444" cy="192024"/>
-          </a:xfrm>
-          <a:prstGeom prst="ellipse">
-            <a:avLst/>
-          </a:prstGeom>
-          <a:solidFill>
-            <a:srgbClr val="B8618C"/>
-          </a:solidFill>
-          <a:ln>
-            <a:noFill/>
-          </a:ln>
-        </p:spPr>
-        <p:txBody>
-          <a:bodyPr rtlCol="0" anchor="ctr"/>
-          <a:lstStyle/>
-          <a:p>
-            <a:pPr algn="ctr"/>
-          </a:p>
-        </p:txBody>
-      </p:sp>
-      <p:sp>
-        <p:nvSpPr>
-          <p:cNvPr id="11" name="장식"/>
-          <p:cNvSpPr/>
-          <p:nvPr/>
-        </p:nvSpPr>
-        <p:spPr>
-          <a:xfrm rot="5520000">
-            <a:off x="5223437" y="1279736"/>
-            <a:ext cx="123444" cy="192024"/>
-          </a:xfrm>
-          <a:prstGeom prst="ellipse">
-            <a:avLst/>
-          </a:prstGeom>
-          <a:solidFill>
-            <a:srgbClr val="EED3E0"/>
-          </a:solidFill>
-          <a:ln>
-            <a:noFill/>
-          </a:ln>
-        </p:spPr>
-        <p:txBody>
-          <a:bodyPr rtlCol="0" anchor="ctr"/>
-          <a:lstStyle/>
-          <a:p>
-            <a:pPr algn="ctr"/>
-          </a:p>
-        </p:txBody>
-      </p:sp>
-      <p:sp>
-        <p:nvSpPr>
-          <p:cNvPr id="12" name="장식"/>
-          <p:cNvSpPr/>
-          <p:nvPr/>
-        </p:nvSpPr>
-        <p:spPr>
-          <a:xfrm rot="9840000">
-            <a:off x="5137403" y="1389855"/>
-            <a:ext cx="123444" cy="192024"/>
-          </a:xfrm>
-          <a:prstGeom prst="ellipse">
-            <a:avLst/>
-          </a:prstGeom>
-          <a:solidFill>
-            <a:srgbClr val="B8618C"/>
-          </a:solidFill>
-          <a:ln>
-            <a:noFill/>
-          </a:ln>
-        </p:spPr>
-        <p:txBody>
-          <a:bodyPr rtlCol="0" anchor="ctr"/>
-          <a:lstStyle/>
-          <a:p>
-            <a:pPr algn="ctr"/>
-          </a:p>
-        </p:txBody>
-      </p:sp>
-      <p:sp>
-        <p:nvSpPr>
-          <p:cNvPr id="13" name="장식"/>
-          <p:cNvSpPr/>
-          <p:nvPr/>
-        </p:nvSpPr>
-        <p:spPr>
-          <a:xfrm rot="14160000">
-            <a:off x="5006088" y="1342060"/>
-            <a:ext cx="123444" cy="192024"/>
-          </a:xfrm>
-          <a:prstGeom prst="ellipse">
-            <a:avLst/>
-          </a:prstGeom>
-          <a:solidFill>
-            <a:srgbClr val="EED3E0"/>
-          </a:solidFill>
-          <a:ln>
-            <a:noFill/>
-          </a:ln>
-        </p:spPr>
-        <p:txBody>
-          <a:bodyPr rtlCol="0" anchor="ctr"/>
-          <a:lstStyle/>
-          <a:p>
-            <a:pPr algn="ctr"/>
-          </a:p>
-        </p:txBody>
-      </p:sp>
-      <p:sp>
-        <p:nvSpPr>
-          <p:cNvPr id="14" name="장식"/>
-          <p:cNvSpPr/>
-          <p:nvPr/>
-        </p:nvSpPr>
-        <p:spPr>
-          <a:xfrm rot="18480000">
-            <a:off x="5010965" y="1202403"/>
-            <a:ext cx="123444" cy="192024"/>
-          </a:xfrm>
-          <a:prstGeom prst="ellipse">
-            <a:avLst/>
-          </a:prstGeom>
-          <a:solidFill>
-            <a:srgbClr val="B8618C"/>
-          </a:solidFill>
-          <a:ln>
-            <a:noFill/>
-          </a:ln>
-        </p:spPr>
-        <p:txBody>
-          <a:bodyPr rtlCol="0" anchor="ctr"/>
-          <a:lstStyle/>
-          <a:p>
-            <a:pPr algn="ctr"/>
-          </a:p>
-        </p:txBody>
-      </p:sp>
-      <p:sp>
-        <p:nvSpPr>
-          <p:cNvPr id="15" name="장식"/>
-          <p:cNvSpPr/>
-          <p:nvPr/>
-        </p:nvSpPr>
-        <p:spPr>
-          <a:xfrm>
-            <a:off x="5125212" y="1330452"/>
-            <a:ext cx="82296" cy="82296"/>
-          </a:xfrm>
-          <a:prstGeom prst="ellipse">
-            <a:avLst/>
-          </a:prstGeom>
-          <a:solidFill>
-            <a:srgbClr val="3F8D3F"/>
-          </a:solidFill>
-          <a:ln>
-            <a:noFill/>
-          </a:ln>
-        </p:spPr>
-        <p:txBody>
-          <a:bodyPr rtlCol="0" anchor="ctr"/>
-          <a:lstStyle/>
-          <a:p>
-            <a:pPr algn="ctr"/>
-          </a:p>
-        </p:txBody>
-      </p:sp>
-      <p:sp>
-        <p:nvSpPr>
-          <p:cNvPr id="16" name="장식"/>
-          <p:cNvSpPr/>
-          <p:nvPr/>
-        </p:nvSpPr>
-        <p:spPr>
-          <a:xfrm rot="2400000">
-            <a:off x="6184537" y="1260178"/>
-            <a:ext cx="103692" cy="161300"/>
-          </a:xfrm>
-          <a:prstGeom prst="ellipse">
-            <a:avLst/>
-          </a:prstGeom>
-          <a:solidFill>
-            <a:srgbClr val="B8618C"/>
-          </a:solidFill>
-          <a:ln>
-            <a:noFill/>
-          </a:ln>
-        </p:spPr>
-        <p:txBody>
-          <a:bodyPr rtlCol="0" anchor="ctr"/>
-          <a:lstStyle/>
-          <a:p>
-            <a:pPr algn="ctr"/>
-          </a:p>
-        </p:txBody>
-      </p:sp>
-      <p:sp>
-        <p:nvSpPr>
-          <p:cNvPr id="17" name="장식"/>
-          <p:cNvSpPr/>
-          <p:nvPr/>
-        </p:nvSpPr>
-        <p:spPr>
-          <a:xfrm rot="6720000">
-            <a:off x="6212935" y="1374075"/>
-            <a:ext cx="103692" cy="161300"/>
-          </a:xfrm>
-          <a:prstGeom prst="ellipse">
-            <a:avLst/>
-          </a:prstGeom>
-          <a:solidFill>
-            <a:srgbClr val="EED3E0"/>
-          </a:solidFill>
-          <a:ln>
-            <a:noFill/>
-          </a:ln>
-        </p:spPr>
-        <p:txBody>
-          <a:bodyPr rtlCol="0" anchor="ctr"/>
-          <a:lstStyle/>
-          <a:p>
-            <a:pPr algn="ctr"/>
-          </a:p>
-        </p:txBody>
-      </p:sp>
-      <p:sp>
-        <p:nvSpPr>
-          <p:cNvPr id="18" name="장식"/>
-          <p:cNvSpPr/>
-          <p:nvPr/>
-        </p:nvSpPr>
-        <p:spPr>
-          <a:xfrm rot="11040000">
-            <a:off x="6113388" y="1436279"/>
-            <a:ext cx="103692" cy="161300"/>
-          </a:xfrm>
-          <a:prstGeom prst="ellipse">
-            <a:avLst/>
-          </a:prstGeom>
-          <a:solidFill>
-            <a:srgbClr val="B8618C"/>
-          </a:solidFill>
-          <a:ln>
-            <a:noFill/>
-          </a:ln>
-        </p:spPr>
-        <p:txBody>
-          <a:bodyPr rtlCol="0" anchor="ctr"/>
-          <a:lstStyle/>
-          <a:p>
-            <a:pPr algn="ctr"/>
-          </a:p>
-        </p:txBody>
-      </p:sp>
-      <p:sp>
-        <p:nvSpPr>
-          <p:cNvPr id="19" name="장식"/>
-          <p:cNvSpPr/>
-          <p:nvPr/>
-        </p:nvSpPr>
-        <p:spPr>
-          <a:xfrm rot="15360000">
-            <a:off x="6023467" y="1360826"/>
-            <a:ext cx="103692" cy="161300"/>
-          </a:xfrm>
-          <a:prstGeom prst="ellipse">
-            <a:avLst/>
-          </a:prstGeom>
-          <a:solidFill>
-            <a:srgbClr val="EED3E0"/>
-          </a:solidFill>
-          <a:ln>
-            <a:noFill/>
-          </a:ln>
-        </p:spPr>
-        <p:txBody>
-          <a:bodyPr rtlCol="0" anchor="ctr"/>
-          <a:lstStyle/>
-          <a:p>
-            <a:pPr algn="ctr"/>
-          </a:p>
-        </p:txBody>
-      </p:sp>
-      <p:sp>
-        <p:nvSpPr>
-          <p:cNvPr id="20" name="장식"/>
-          <p:cNvSpPr/>
-          <p:nvPr/>
-        </p:nvSpPr>
-        <p:spPr>
-          <a:xfrm rot="19680000">
-            <a:off x="6067439" y="1251990"/>
-            <a:ext cx="103692" cy="161300"/>
-          </a:xfrm>
-          <a:prstGeom prst="ellipse">
-            <a:avLst/>
-          </a:prstGeom>
-          <a:solidFill>
-            <a:srgbClr val="B8618C"/>
-          </a:solidFill>
-          <a:ln>
-            <a:noFill/>
-          </a:ln>
-        </p:spPr>
-        <p:txBody>
-          <a:bodyPr rtlCol="0" anchor="ctr"/>
-          <a:lstStyle/>
-          <a:p>
-            <a:pPr algn="ctr"/>
-          </a:p>
-        </p:txBody>
-      </p:sp>
-      <p:sp>
-        <p:nvSpPr>
-          <p:cNvPr id="21" name="장식"/>
-          <p:cNvSpPr/>
-          <p:nvPr/>
-        </p:nvSpPr>
-        <p:spPr>
-          <a:xfrm>
-            <a:off x="6137635" y="1382755"/>
-            <a:ext cx="69128" cy="69128"/>
-          </a:xfrm>
-          <a:prstGeom prst="ellipse">
-            <a:avLst/>
-          </a:prstGeom>
-          <a:solidFill>
-            <a:srgbClr val="3F8D3F"/>
-          </a:solidFill>
-          <a:ln>
-            <a:noFill/>
-          </a:ln>
-        </p:spPr>
-        <p:txBody>
-          <a:bodyPr rtlCol="0" anchor="ctr"/>
-          <a:lstStyle/>
-          <a:p>
-            <a:pPr algn="ctr"/>
-          </a:p>
-        </p:txBody>
-      </p:sp>
-      <p:sp>
-        <p:nvSpPr>
           <p:cNvPr id="2" name="Title 1"/>
           <p:cNvSpPr>
             <a:spLocks noGrp="1"/>
@@ -6774,14 +4149,14 @@
                   <a:srgbClr val="7B3759"/>
                 </a:solidFill>
               </a:rPr>
-              <a:t>작은 기쁨을 놓치지 마세요</a:t>
-            </a:r>
-          </a:p>
-        </p:txBody>
-      </p:sp>
-      <p:sp>
-        <p:nvSpPr>
-          <p:cNvPr id="22" name="번호"/>
+              <a:t>퇴근길 한 정거장 걷기</a:t>
+            </a:r>
+          </a:p>
+        </p:txBody>
+      </p:sp>
+      <p:sp>
+        <p:nvSpPr>
+          <p:cNvPr id="4" name="번호"/>
           <p:cNvSpPr txBox="1"/>
           <p:nvPr/>
         </p:nvSpPr>
@@ -6819,7 +4194,7 @@
       </p:sp>
       <p:sp>
         <p:nvSpPr>
-          <p:cNvPr id="23" name="본문"/>
+          <p:cNvPr id="5" name="본문"/>
           <p:cNvSpPr txBox="1"/>
           <p:nvPr/>
         </p:nvSpPr>
@@ -6850,14 +4225,14 @@
                   <a:srgbClr val="2B2B2B"/>
                 </a:solidFill>
               </a:rPr>
-              <a:t>따뜻한 차 한 잔, 좋은 노래 한 곡이면 충분해요.</a:t>
-            </a:r>
-          </a:p>
-        </p:txBody>
-      </p:sp>
-      <p:sp>
-        <p:nvSpPr>
-          <p:cNvPr id="24" name="쪽 번호"/>
+              <a:t>한 정거장 먼저 내려 걸으면 머리가 정리돼요.</a:t>
+            </a:r>
+          </a:p>
+        </p:txBody>
+      </p:sp>
+      <p:sp>
+        <p:nvSpPr>
+          <p:cNvPr id="6" name="쪽 번호"/>
           <p:cNvSpPr txBox="1"/>
           <p:nvPr/>
         </p:nvSpPr>
@@ -6952,528 +4327,6 @@
       </p:sp>
       <p:sp>
         <p:nvSpPr>
-          <p:cNvPr id="4" name="장식"/>
-          <p:cNvSpPr/>
-          <p:nvPr/>
-        </p:nvSpPr>
-        <p:spPr>
-          <a:xfrm>
-            <a:off x="5545836" y="530352"/>
-            <a:ext cx="246888" cy="384048"/>
-          </a:xfrm>
-          <a:prstGeom prst="ellipse">
-            <a:avLst/>
-          </a:prstGeom>
-          <a:solidFill>
-            <a:srgbClr val="B8618C"/>
-          </a:solidFill>
-          <a:ln>
-            <a:noFill/>
-          </a:ln>
-        </p:spPr>
-        <p:txBody>
-          <a:bodyPr rtlCol="0" anchor="ctr"/>
-          <a:lstStyle/>
-          <a:p>
-            <a:pPr algn="ctr"/>
-          </a:p>
-        </p:txBody>
-      </p:sp>
-      <p:sp>
-        <p:nvSpPr>
-          <p:cNvPr id="5" name="장식"/>
-          <p:cNvSpPr/>
-          <p:nvPr/>
-        </p:nvSpPr>
-        <p:spPr>
-          <a:xfrm rot="4320000">
-            <a:off x="5771943" y="694629"/>
-            <a:ext cx="246888" cy="384048"/>
-          </a:xfrm>
-          <a:prstGeom prst="ellipse">
-            <a:avLst/>
-          </a:prstGeom>
-          <a:solidFill>
-            <a:srgbClr val="EED3E0"/>
-          </a:solidFill>
-          <a:ln>
-            <a:noFill/>
-          </a:ln>
-        </p:spPr>
-        <p:txBody>
-          <a:bodyPr rtlCol="0" anchor="ctr"/>
-          <a:lstStyle/>
-          <a:p>
-            <a:pPr algn="ctr"/>
-          </a:p>
-        </p:txBody>
-      </p:sp>
-      <p:sp>
-        <p:nvSpPr>
-          <p:cNvPr id="6" name="장식"/>
-          <p:cNvSpPr/>
-          <p:nvPr/>
-        </p:nvSpPr>
-        <p:spPr>
-          <a:xfrm rot="8640000">
-            <a:off x="5685578" y="960434"/>
-            <a:ext cx="246888" cy="384048"/>
-          </a:xfrm>
-          <a:prstGeom prst="ellipse">
-            <a:avLst/>
-          </a:prstGeom>
-          <a:solidFill>
-            <a:srgbClr val="B8618C"/>
-          </a:solidFill>
-          <a:ln>
-            <a:noFill/>
-          </a:ln>
-        </p:spPr>
-        <p:txBody>
-          <a:bodyPr rtlCol="0" anchor="ctr"/>
-          <a:lstStyle/>
-          <a:p>
-            <a:pPr algn="ctr"/>
-          </a:p>
-        </p:txBody>
-      </p:sp>
-      <p:sp>
-        <p:nvSpPr>
-          <p:cNvPr id="7" name="장식"/>
-          <p:cNvSpPr/>
-          <p:nvPr/>
-        </p:nvSpPr>
-        <p:spPr>
-          <a:xfrm rot="12960000">
-            <a:off x="5406093" y="960434"/>
-            <a:ext cx="246888" cy="384048"/>
-          </a:xfrm>
-          <a:prstGeom prst="ellipse">
-            <a:avLst/>
-          </a:prstGeom>
-          <a:solidFill>
-            <a:srgbClr val="EED3E0"/>
-          </a:solidFill>
-          <a:ln>
-            <a:noFill/>
-          </a:ln>
-        </p:spPr>
-        <p:txBody>
-          <a:bodyPr rtlCol="0" anchor="ctr"/>
-          <a:lstStyle/>
-          <a:p>
-            <a:pPr algn="ctr"/>
-          </a:p>
-        </p:txBody>
-      </p:sp>
-      <p:sp>
-        <p:nvSpPr>
-          <p:cNvPr id="8" name="장식"/>
-          <p:cNvSpPr/>
-          <p:nvPr/>
-        </p:nvSpPr>
-        <p:spPr>
-          <a:xfrm rot="17280000">
-            <a:off x="5319728" y="694629"/>
-            <a:ext cx="246888" cy="384048"/>
-          </a:xfrm>
-          <a:prstGeom prst="ellipse">
-            <a:avLst/>
-          </a:prstGeom>
-          <a:solidFill>
-            <a:srgbClr val="B8618C"/>
-          </a:solidFill>
-          <a:ln>
-            <a:noFill/>
-          </a:ln>
-        </p:spPr>
-        <p:txBody>
-          <a:bodyPr rtlCol="0" anchor="ctr"/>
-          <a:lstStyle/>
-          <a:p>
-            <a:pPr algn="ctr"/>
-          </a:p>
-        </p:txBody>
-      </p:sp>
-      <p:sp>
-        <p:nvSpPr>
-          <p:cNvPr id="9" name="장식"/>
-          <p:cNvSpPr/>
-          <p:nvPr/>
-        </p:nvSpPr>
-        <p:spPr>
-          <a:xfrm>
-            <a:off x="5586984" y="877824"/>
-            <a:ext cx="164592" cy="164592"/>
-          </a:xfrm>
-          <a:prstGeom prst="ellipse">
-            <a:avLst/>
-          </a:prstGeom>
-          <a:solidFill>
-            <a:srgbClr val="3F8D3F"/>
-          </a:solidFill>
-          <a:ln>
-            <a:noFill/>
-          </a:ln>
-        </p:spPr>
-        <p:txBody>
-          <a:bodyPr rtlCol="0" anchor="ctr"/>
-          <a:lstStyle/>
-          <a:p>
-            <a:pPr algn="ctr"/>
-          </a:p>
-        </p:txBody>
-      </p:sp>
-      <p:sp>
-        <p:nvSpPr>
-          <p:cNvPr id="10" name="장식"/>
-          <p:cNvSpPr/>
-          <p:nvPr/>
-        </p:nvSpPr>
-        <p:spPr>
-          <a:xfrm rot="1200000">
-            <a:off x="5145294" y="1163884"/>
-            <a:ext cx="123444" cy="192024"/>
-          </a:xfrm>
-          <a:prstGeom prst="ellipse">
-            <a:avLst/>
-          </a:prstGeom>
-          <a:solidFill>
-            <a:srgbClr val="B8618C"/>
-          </a:solidFill>
-          <a:ln>
-            <a:noFill/>
-          </a:ln>
-        </p:spPr>
-        <p:txBody>
-          <a:bodyPr rtlCol="0" anchor="ctr"/>
-          <a:lstStyle/>
-          <a:p>
-            <a:pPr algn="ctr"/>
-          </a:p>
-        </p:txBody>
-      </p:sp>
-      <p:sp>
-        <p:nvSpPr>
-          <p:cNvPr id="11" name="장식"/>
-          <p:cNvSpPr/>
-          <p:nvPr/>
-        </p:nvSpPr>
-        <p:spPr>
-          <a:xfrm rot="5520000">
-            <a:off x="5223437" y="1279736"/>
-            <a:ext cx="123444" cy="192024"/>
-          </a:xfrm>
-          <a:prstGeom prst="ellipse">
-            <a:avLst/>
-          </a:prstGeom>
-          <a:solidFill>
-            <a:srgbClr val="EED3E0"/>
-          </a:solidFill>
-          <a:ln>
-            <a:noFill/>
-          </a:ln>
-        </p:spPr>
-        <p:txBody>
-          <a:bodyPr rtlCol="0" anchor="ctr"/>
-          <a:lstStyle/>
-          <a:p>
-            <a:pPr algn="ctr"/>
-          </a:p>
-        </p:txBody>
-      </p:sp>
-      <p:sp>
-        <p:nvSpPr>
-          <p:cNvPr id="12" name="장식"/>
-          <p:cNvSpPr/>
-          <p:nvPr/>
-        </p:nvSpPr>
-        <p:spPr>
-          <a:xfrm rot="9840000">
-            <a:off x="5137403" y="1389855"/>
-            <a:ext cx="123444" cy="192024"/>
-          </a:xfrm>
-          <a:prstGeom prst="ellipse">
-            <a:avLst/>
-          </a:prstGeom>
-          <a:solidFill>
-            <a:srgbClr val="B8618C"/>
-          </a:solidFill>
-          <a:ln>
-            <a:noFill/>
-          </a:ln>
-        </p:spPr>
-        <p:txBody>
-          <a:bodyPr rtlCol="0" anchor="ctr"/>
-          <a:lstStyle/>
-          <a:p>
-            <a:pPr algn="ctr"/>
-          </a:p>
-        </p:txBody>
-      </p:sp>
-      <p:sp>
-        <p:nvSpPr>
-          <p:cNvPr id="13" name="장식"/>
-          <p:cNvSpPr/>
-          <p:nvPr/>
-        </p:nvSpPr>
-        <p:spPr>
-          <a:xfrm rot="14160000">
-            <a:off x="5006088" y="1342060"/>
-            <a:ext cx="123444" cy="192024"/>
-          </a:xfrm>
-          <a:prstGeom prst="ellipse">
-            <a:avLst/>
-          </a:prstGeom>
-          <a:solidFill>
-            <a:srgbClr val="EED3E0"/>
-          </a:solidFill>
-          <a:ln>
-            <a:noFill/>
-          </a:ln>
-        </p:spPr>
-        <p:txBody>
-          <a:bodyPr rtlCol="0" anchor="ctr"/>
-          <a:lstStyle/>
-          <a:p>
-            <a:pPr algn="ctr"/>
-          </a:p>
-        </p:txBody>
-      </p:sp>
-      <p:sp>
-        <p:nvSpPr>
-          <p:cNvPr id="14" name="장식"/>
-          <p:cNvSpPr/>
-          <p:nvPr/>
-        </p:nvSpPr>
-        <p:spPr>
-          <a:xfrm rot="18480000">
-            <a:off x="5010965" y="1202403"/>
-            <a:ext cx="123444" cy="192024"/>
-          </a:xfrm>
-          <a:prstGeom prst="ellipse">
-            <a:avLst/>
-          </a:prstGeom>
-          <a:solidFill>
-            <a:srgbClr val="B8618C"/>
-          </a:solidFill>
-          <a:ln>
-            <a:noFill/>
-          </a:ln>
-        </p:spPr>
-        <p:txBody>
-          <a:bodyPr rtlCol="0" anchor="ctr"/>
-          <a:lstStyle/>
-          <a:p>
-            <a:pPr algn="ctr"/>
-          </a:p>
-        </p:txBody>
-      </p:sp>
-      <p:sp>
-        <p:nvSpPr>
-          <p:cNvPr id="15" name="장식"/>
-          <p:cNvSpPr/>
-          <p:nvPr/>
-        </p:nvSpPr>
-        <p:spPr>
-          <a:xfrm>
-            <a:off x="5125212" y="1330452"/>
-            <a:ext cx="82296" cy="82296"/>
-          </a:xfrm>
-          <a:prstGeom prst="ellipse">
-            <a:avLst/>
-          </a:prstGeom>
-          <a:solidFill>
-            <a:srgbClr val="3F8D3F"/>
-          </a:solidFill>
-          <a:ln>
-            <a:noFill/>
-          </a:ln>
-        </p:spPr>
-        <p:txBody>
-          <a:bodyPr rtlCol="0" anchor="ctr"/>
-          <a:lstStyle/>
-          <a:p>
-            <a:pPr algn="ctr"/>
-          </a:p>
-        </p:txBody>
-      </p:sp>
-      <p:sp>
-        <p:nvSpPr>
-          <p:cNvPr id="16" name="장식"/>
-          <p:cNvSpPr/>
-          <p:nvPr/>
-        </p:nvSpPr>
-        <p:spPr>
-          <a:xfrm rot="2400000">
-            <a:off x="6184537" y="1260178"/>
-            <a:ext cx="103692" cy="161300"/>
-          </a:xfrm>
-          <a:prstGeom prst="ellipse">
-            <a:avLst/>
-          </a:prstGeom>
-          <a:solidFill>
-            <a:srgbClr val="B8618C"/>
-          </a:solidFill>
-          <a:ln>
-            <a:noFill/>
-          </a:ln>
-        </p:spPr>
-        <p:txBody>
-          <a:bodyPr rtlCol="0" anchor="ctr"/>
-          <a:lstStyle/>
-          <a:p>
-            <a:pPr algn="ctr"/>
-          </a:p>
-        </p:txBody>
-      </p:sp>
-      <p:sp>
-        <p:nvSpPr>
-          <p:cNvPr id="17" name="장식"/>
-          <p:cNvSpPr/>
-          <p:nvPr/>
-        </p:nvSpPr>
-        <p:spPr>
-          <a:xfrm rot="6720000">
-            <a:off x="6212935" y="1374075"/>
-            <a:ext cx="103692" cy="161300"/>
-          </a:xfrm>
-          <a:prstGeom prst="ellipse">
-            <a:avLst/>
-          </a:prstGeom>
-          <a:solidFill>
-            <a:srgbClr val="EED3E0"/>
-          </a:solidFill>
-          <a:ln>
-            <a:noFill/>
-          </a:ln>
-        </p:spPr>
-        <p:txBody>
-          <a:bodyPr rtlCol="0" anchor="ctr"/>
-          <a:lstStyle/>
-          <a:p>
-            <a:pPr algn="ctr"/>
-          </a:p>
-        </p:txBody>
-      </p:sp>
-      <p:sp>
-        <p:nvSpPr>
-          <p:cNvPr id="18" name="장식"/>
-          <p:cNvSpPr/>
-          <p:nvPr/>
-        </p:nvSpPr>
-        <p:spPr>
-          <a:xfrm rot="11040000">
-            <a:off x="6113388" y="1436279"/>
-            <a:ext cx="103692" cy="161300"/>
-          </a:xfrm>
-          <a:prstGeom prst="ellipse">
-            <a:avLst/>
-          </a:prstGeom>
-          <a:solidFill>
-            <a:srgbClr val="B8618C"/>
-          </a:solidFill>
-          <a:ln>
-            <a:noFill/>
-          </a:ln>
-        </p:spPr>
-        <p:txBody>
-          <a:bodyPr rtlCol="0" anchor="ctr"/>
-          <a:lstStyle/>
-          <a:p>
-            <a:pPr algn="ctr"/>
-          </a:p>
-        </p:txBody>
-      </p:sp>
-      <p:sp>
-        <p:nvSpPr>
-          <p:cNvPr id="19" name="장식"/>
-          <p:cNvSpPr/>
-          <p:nvPr/>
-        </p:nvSpPr>
-        <p:spPr>
-          <a:xfrm rot="15360000">
-            <a:off x="6023467" y="1360826"/>
-            <a:ext cx="103692" cy="161300"/>
-          </a:xfrm>
-          <a:prstGeom prst="ellipse">
-            <a:avLst/>
-          </a:prstGeom>
-          <a:solidFill>
-            <a:srgbClr val="EED3E0"/>
-          </a:solidFill>
-          <a:ln>
-            <a:noFill/>
-          </a:ln>
-        </p:spPr>
-        <p:txBody>
-          <a:bodyPr rtlCol="0" anchor="ctr"/>
-          <a:lstStyle/>
-          <a:p>
-            <a:pPr algn="ctr"/>
-          </a:p>
-        </p:txBody>
-      </p:sp>
-      <p:sp>
-        <p:nvSpPr>
-          <p:cNvPr id="20" name="장식"/>
-          <p:cNvSpPr/>
-          <p:nvPr/>
-        </p:nvSpPr>
-        <p:spPr>
-          <a:xfrm rot="19680000">
-            <a:off x="6067439" y="1251990"/>
-            <a:ext cx="103692" cy="161300"/>
-          </a:xfrm>
-          <a:prstGeom prst="ellipse">
-            <a:avLst/>
-          </a:prstGeom>
-          <a:solidFill>
-            <a:srgbClr val="B8618C"/>
-          </a:solidFill>
-          <a:ln>
-            <a:noFill/>
-          </a:ln>
-        </p:spPr>
-        <p:txBody>
-          <a:bodyPr rtlCol="0" anchor="ctr"/>
-          <a:lstStyle/>
-          <a:p>
-            <a:pPr algn="ctr"/>
-          </a:p>
-        </p:txBody>
-      </p:sp>
-      <p:sp>
-        <p:nvSpPr>
-          <p:cNvPr id="21" name="장식"/>
-          <p:cNvSpPr/>
-          <p:nvPr/>
-        </p:nvSpPr>
-        <p:spPr>
-          <a:xfrm>
-            <a:off x="6137635" y="1382755"/>
-            <a:ext cx="69128" cy="69128"/>
-          </a:xfrm>
-          <a:prstGeom prst="ellipse">
-            <a:avLst/>
-          </a:prstGeom>
-          <a:solidFill>
-            <a:srgbClr val="3F8D3F"/>
-          </a:solidFill>
-          <a:ln>
-            <a:noFill/>
-          </a:ln>
-        </p:spPr>
-        <p:txBody>
-          <a:bodyPr rtlCol="0" anchor="ctr"/>
-          <a:lstStyle/>
-          <a:p>
-            <a:pPr algn="ctr"/>
-          </a:p>
-        </p:txBody>
-      </p:sp>
-      <p:sp>
-        <p:nvSpPr>
           <p:cNvPr id="2" name="Title 1"/>
           <p:cNvSpPr>
             <a:spLocks noGrp="1"/>
@@ -7505,14 +4358,14 @@
                   <a:srgbClr val="7B3759"/>
                 </a:solidFill>
               </a:rPr>
-              <a:t>내일은 내일의 해가 떠요</a:t>
-            </a:r>
-          </a:p>
-        </p:txBody>
-      </p:sp>
-      <p:sp>
-        <p:nvSpPr>
-          <p:cNvPr id="22" name="번호"/>
+              <a:t>오늘은 일찍 자기</a:t>
+            </a:r>
+          </a:p>
+        </p:txBody>
+      </p:sp>
+      <p:sp>
+        <p:nvSpPr>
+          <p:cNvPr id="4" name="번호"/>
           <p:cNvSpPr txBox="1"/>
           <p:nvPr/>
         </p:nvSpPr>
@@ -7550,7 +4403,7 @@
       </p:sp>
       <p:sp>
         <p:nvSpPr>
-          <p:cNvPr id="23" name="본문"/>
+          <p:cNvPr id="5" name="본문"/>
           <p:cNvSpPr txBox="1"/>
           <p:nvPr/>
         </p:nvSpPr>
@@ -7581,14 +4434,14 @@
                   <a:srgbClr val="2B2B2B"/>
                 </a:solidFill>
               </a:rPr>
-              <a:t>오늘은 푹 쉬고 내일 다시 시작해요.</a:t>
-            </a:r>
-          </a:p>
-        </p:txBody>
-      </p:sp>
-      <p:sp>
-        <p:nvSpPr>
-          <p:cNvPr id="24" name="쪽 번호"/>
+              <a:t>미룬 일은 내일 해도 돼요. 오늘은 불을 일찍 끄세요.</a:t>
+            </a:r>
+          </a:p>
+        </p:txBody>
+      </p:sp>
+      <p:sp>
+        <p:nvSpPr>
+          <p:cNvPr id="6" name="쪽 번호"/>
           <p:cNvSpPr txBox="1"/>
           <p:nvPr/>
         </p:nvSpPr>
@@ -7635,14 +4488,6 @@
 <file path=ppt/slides/slide7.xml><?xml version="1.0" encoding="utf-8"?>
 <p:sld xmlns:a="http://schemas.openxmlformats.org/drawingml/2006/main" xmlns:p="http://schemas.openxmlformats.org/presentationml/2006/main" xmlns:r="http://schemas.openxmlformats.org/officeDocument/2006/relationships">
   <p:cSld>
-    <p:bg>
-      <p:bgPr>
-        <a:solidFill>
-          <a:srgbClr val="7B3759"/>
-        </a:solidFill>
-        <a:effectLst/>
-      </p:bgPr>
-    </p:bg>
     <p:spTree>
       <p:nvGrpSpPr>
         <p:cNvPr id="1" name=""/>
@@ -7650,559 +4495,30 @@
         <p:nvPr/>
       </p:nvGrpSpPr>
       <p:grpSpPr/>
-      <p:sp>
-        <p:nvSpPr>
-          <p:cNvPr id="3" name="장식"/>
-          <p:cNvSpPr/>
+      <p:pic>
+        <p:nvPicPr>
+          <p:cNvPr id="3" name="표지 그림" descr="news-25.jpg"/>
+          <p:cNvPicPr>
+            <a:picLocks noChangeAspect="1"/>
+          </p:cNvPicPr>
           <p:nvPr/>
-        </p:nvSpPr>
-        <p:spPr>
-          <a:xfrm>
-            <a:off x="457200" y="457200"/>
-            <a:ext cx="5943600" cy="5943600"/>
-          </a:xfrm>
-          <a:prstGeom prst="roundRect">
-            <a:avLst>
-              <a:gd name="adj" fmla="val 5000"/>
-            </a:avLst>
-          </a:prstGeom>
-          <a:solidFill>
-            <a:srgbClr val="FFFFFF"/>
-          </a:solidFill>
-          <a:ln>
-            <a:noFill/>
-          </a:ln>
-        </p:spPr>
-        <p:txBody>
-          <a:bodyPr rtlCol="0" anchor="ctr"/>
-          <a:lstStyle/>
-          <a:p>
-            <a:pPr algn="ctr"/>
-          </a:p>
-        </p:txBody>
-      </p:sp>
-      <p:sp>
-        <p:nvSpPr>
-          <p:cNvPr id="4" name="장식"/>
-          <p:cNvSpPr/>
-          <p:nvPr/>
-        </p:nvSpPr>
-        <p:spPr>
-          <a:xfrm>
-            <a:off x="3225317" y="662482"/>
-            <a:ext cx="407365" cy="633679"/>
-          </a:xfrm>
-          <a:prstGeom prst="ellipse">
+        </p:nvPicPr>
+        <p:blipFill>
+          <a:blip r:embed="rId2"/>
+          <a:stretch>
+            <a:fillRect/>
+          </a:stretch>
+        </p:blipFill>
+        <p:spPr>
+          <a:xfrm>
+            <a:off x="0" y="0"/>
+            <a:ext cx="6858000" cy="6858000"/>
+          </a:xfrm>
+          <a:prstGeom prst="rect">
             <a:avLst/>
           </a:prstGeom>
-          <a:solidFill>
-            <a:srgbClr val="B8618C"/>
-          </a:solidFill>
-          <a:ln>
-            <a:noFill/>
-          </a:ln>
-        </p:spPr>
-        <p:txBody>
-          <a:bodyPr rtlCol="0" anchor="ctr"/>
-          <a:lstStyle/>
-          <a:p>
-            <a:pPr algn="ctr"/>
-          </a:p>
-        </p:txBody>
-      </p:sp>
-      <p:sp>
-        <p:nvSpPr>
-          <p:cNvPr id="5" name="장식"/>
-          <p:cNvSpPr/>
-          <p:nvPr/>
-        </p:nvSpPr>
-        <p:spPr>
-          <a:xfrm rot="4320000">
-            <a:off x="3598395" y="933539"/>
-            <a:ext cx="407365" cy="633679"/>
-          </a:xfrm>
-          <a:prstGeom prst="ellipse">
-            <a:avLst/>
-          </a:prstGeom>
-          <a:solidFill>
-            <a:srgbClr val="EED3E0"/>
-          </a:solidFill>
-          <a:ln>
-            <a:noFill/>
-          </a:ln>
-        </p:spPr>
-        <p:txBody>
-          <a:bodyPr rtlCol="0" anchor="ctr"/>
-          <a:lstStyle/>
-          <a:p>
-            <a:pPr algn="ctr"/>
-          </a:p>
-        </p:txBody>
-      </p:sp>
-      <p:sp>
-        <p:nvSpPr>
-          <p:cNvPr id="6" name="장식"/>
-          <p:cNvSpPr/>
-          <p:nvPr/>
-        </p:nvSpPr>
-        <p:spPr>
-          <a:xfrm rot="8640000">
-            <a:off x="3455892" y="1372119"/>
-            <a:ext cx="407365" cy="633679"/>
-          </a:xfrm>
-          <a:prstGeom prst="ellipse">
-            <a:avLst/>
-          </a:prstGeom>
-          <a:solidFill>
-            <a:srgbClr val="B8618C"/>
-          </a:solidFill>
-          <a:ln>
-            <a:noFill/>
-          </a:ln>
-        </p:spPr>
-        <p:txBody>
-          <a:bodyPr rtlCol="0" anchor="ctr"/>
-          <a:lstStyle/>
-          <a:p>
-            <a:pPr algn="ctr"/>
-          </a:p>
-        </p:txBody>
-      </p:sp>
-      <p:sp>
-        <p:nvSpPr>
-          <p:cNvPr id="7" name="장식"/>
-          <p:cNvSpPr/>
-          <p:nvPr/>
-        </p:nvSpPr>
-        <p:spPr>
-          <a:xfrm rot="12960000">
-            <a:off x="2994742" y="1372119"/>
-            <a:ext cx="407365" cy="633679"/>
-          </a:xfrm>
-          <a:prstGeom prst="ellipse">
-            <a:avLst/>
-          </a:prstGeom>
-          <a:solidFill>
-            <a:srgbClr val="EED3E0"/>
-          </a:solidFill>
-          <a:ln>
-            <a:noFill/>
-          </a:ln>
-        </p:spPr>
-        <p:txBody>
-          <a:bodyPr rtlCol="0" anchor="ctr"/>
-          <a:lstStyle/>
-          <a:p>
-            <a:pPr algn="ctr"/>
-          </a:p>
-        </p:txBody>
-      </p:sp>
-      <p:sp>
-        <p:nvSpPr>
-          <p:cNvPr id="8" name="장식"/>
-          <p:cNvSpPr/>
-          <p:nvPr/>
-        </p:nvSpPr>
-        <p:spPr>
-          <a:xfrm rot="17280000">
-            <a:off x="2852239" y="933539"/>
-            <a:ext cx="407365" cy="633679"/>
-          </a:xfrm>
-          <a:prstGeom prst="ellipse">
-            <a:avLst/>
-          </a:prstGeom>
-          <a:solidFill>
-            <a:srgbClr val="B8618C"/>
-          </a:solidFill>
-          <a:ln>
-            <a:noFill/>
-          </a:ln>
-        </p:spPr>
-        <p:txBody>
-          <a:bodyPr rtlCol="0" anchor="ctr"/>
-          <a:lstStyle/>
-          <a:p>
-            <a:pPr algn="ctr"/>
-          </a:p>
-        </p:txBody>
-      </p:sp>
-      <p:sp>
-        <p:nvSpPr>
-          <p:cNvPr id="9" name="장식"/>
-          <p:cNvSpPr/>
-          <p:nvPr/>
-        </p:nvSpPr>
-        <p:spPr>
-          <a:xfrm>
-            <a:off x="3293211" y="1235811"/>
-            <a:ext cx="271576" cy="271576"/>
-          </a:xfrm>
-          <a:prstGeom prst="ellipse">
-            <a:avLst/>
-          </a:prstGeom>
-          <a:solidFill>
-            <a:srgbClr val="3F8D3F"/>
-          </a:solidFill>
-          <a:ln>
-            <a:noFill/>
-          </a:ln>
-        </p:spPr>
-        <p:txBody>
-          <a:bodyPr rtlCol="0" anchor="ctr"/>
-          <a:lstStyle/>
-          <a:p>
-            <a:pPr algn="ctr"/>
-          </a:p>
-        </p:txBody>
-      </p:sp>
-      <p:sp>
-        <p:nvSpPr>
-          <p:cNvPr id="10" name="장식"/>
-          <p:cNvSpPr/>
-          <p:nvPr/>
-        </p:nvSpPr>
-        <p:spPr>
-          <a:xfrm rot="1200000">
-            <a:off x="2564424" y="1707812"/>
-            <a:ext cx="203682" cy="316839"/>
-          </a:xfrm>
-          <a:prstGeom prst="ellipse">
-            <a:avLst/>
-          </a:prstGeom>
-          <a:solidFill>
-            <a:srgbClr val="B8618C"/>
-          </a:solidFill>
-          <a:ln>
-            <a:noFill/>
-          </a:ln>
-        </p:spPr>
-        <p:txBody>
-          <a:bodyPr rtlCol="0" anchor="ctr"/>
-          <a:lstStyle/>
-          <a:p>
-            <a:pPr algn="ctr"/>
-          </a:p>
-        </p:txBody>
-      </p:sp>
-      <p:sp>
-        <p:nvSpPr>
-          <p:cNvPr id="11" name="장식"/>
-          <p:cNvSpPr/>
-          <p:nvPr/>
-        </p:nvSpPr>
-        <p:spPr>
-          <a:xfrm rot="5520000">
-            <a:off x="2693360" y="1898967"/>
-            <a:ext cx="203682" cy="316839"/>
-          </a:xfrm>
-          <a:prstGeom prst="ellipse">
-            <a:avLst/>
-          </a:prstGeom>
-          <a:solidFill>
-            <a:srgbClr val="EED3E0"/>
-          </a:solidFill>
-          <a:ln>
-            <a:noFill/>
-          </a:ln>
-        </p:spPr>
-        <p:txBody>
-          <a:bodyPr rtlCol="0" anchor="ctr"/>
-          <a:lstStyle/>
-          <a:p>
-            <a:pPr algn="ctr"/>
-          </a:p>
-        </p:txBody>
-      </p:sp>
-      <p:sp>
-        <p:nvSpPr>
-          <p:cNvPr id="12" name="장식"/>
-          <p:cNvSpPr/>
-          <p:nvPr/>
-        </p:nvSpPr>
-        <p:spPr>
-          <a:xfrm rot="9840000">
-            <a:off x="2551403" y="2080662"/>
-            <a:ext cx="203682" cy="316839"/>
-          </a:xfrm>
-          <a:prstGeom prst="ellipse">
-            <a:avLst/>
-          </a:prstGeom>
-          <a:solidFill>
-            <a:srgbClr val="B8618C"/>
-          </a:solidFill>
-          <a:ln>
-            <a:noFill/>
-          </a:ln>
-        </p:spPr>
-        <p:txBody>
-          <a:bodyPr rtlCol="0" anchor="ctr"/>
-          <a:lstStyle/>
-          <a:p>
-            <a:pPr algn="ctr"/>
-          </a:p>
-        </p:txBody>
-      </p:sp>
-      <p:sp>
-        <p:nvSpPr>
-          <p:cNvPr id="13" name="장식"/>
-          <p:cNvSpPr/>
-          <p:nvPr/>
-        </p:nvSpPr>
-        <p:spPr>
-          <a:xfrm rot="14160000">
-            <a:off x="2334734" y="2001801"/>
-            <a:ext cx="203682" cy="316839"/>
-          </a:xfrm>
-          <a:prstGeom prst="ellipse">
-            <a:avLst/>
-          </a:prstGeom>
-          <a:solidFill>
-            <a:srgbClr val="EED3E0"/>
-          </a:solidFill>
-          <a:ln>
-            <a:noFill/>
-          </a:ln>
-        </p:spPr>
-        <p:txBody>
-          <a:bodyPr rtlCol="0" anchor="ctr"/>
-          <a:lstStyle/>
-          <a:p>
-            <a:pPr algn="ctr"/>
-          </a:p>
-        </p:txBody>
-      </p:sp>
-      <p:sp>
-        <p:nvSpPr>
-          <p:cNvPr id="14" name="장식"/>
-          <p:cNvSpPr/>
-          <p:nvPr/>
-        </p:nvSpPr>
-        <p:spPr>
-          <a:xfrm rot="18480000">
-            <a:off x="2342781" y="1771367"/>
-            <a:ext cx="203682" cy="316839"/>
-          </a:xfrm>
-          <a:prstGeom prst="ellipse">
-            <a:avLst/>
-          </a:prstGeom>
-          <a:solidFill>
-            <a:srgbClr val="B8618C"/>
-          </a:solidFill>
-          <a:ln>
-            <a:noFill/>
-          </a:ln>
-        </p:spPr>
-        <p:txBody>
-          <a:bodyPr rtlCol="0" anchor="ctr"/>
-          <a:lstStyle/>
-          <a:p>
-            <a:pPr algn="ctr"/>
-          </a:p>
-        </p:txBody>
-      </p:sp>
-      <p:sp>
-        <p:nvSpPr>
-          <p:cNvPr id="15" name="장식"/>
-          <p:cNvSpPr/>
-          <p:nvPr/>
-        </p:nvSpPr>
-        <p:spPr>
-          <a:xfrm>
-            <a:off x="2531287" y="1982647"/>
-            <a:ext cx="135788" cy="135788"/>
-          </a:xfrm>
-          <a:prstGeom prst="ellipse">
-            <a:avLst/>
-          </a:prstGeom>
-          <a:solidFill>
-            <a:srgbClr val="3F8D3F"/>
-          </a:solidFill>
-          <a:ln>
-            <a:noFill/>
-          </a:ln>
-        </p:spPr>
-        <p:txBody>
-          <a:bodyPr rtlCol="0" anchor="ctr"/>
-          <a:lstStyle/>
-          <a:p>
-            <a:pPr algn="ctr"/>
-          </a:p>
-        </p:txBody>
-      </p:sp>
-      <p:sp>
-        <p:nvSpPr>
-          <p:cNvPr id="16" name="장식"/>
-          <p:cNvSpPr/>
-          <p:nvPr/>
-        </p:nvSpPr>
-        <p:spPr>
-          <a:xfrm rot="2400000">
-            <a:off x="4279174" y="1866696"/>
-            <a:ext cx="171093" cy="266145"/>
-          </a:xfrm>
-          <a:prstGeom prst="ellipse">
-            <a:avLst/>
-          </a:prstGeom>
-          <a:solidFill>
-            <a:srgbClr val="B8618C"/>
-          </a:solidFill>
-          <a:ln>
-            <a:noFill/>
-          </a:ln>
-        </p:spPr>
-        <p:txBody>
-          <a:bodyPr rtlCol="0" anchor="ctr"/>
-          <a:lstStyle/>
-          <a:p>
-            <a:pPr algn="ctr"/>
-          </a:p>
-        </p:txBody>
-      </p:sp>
-      <p:sp>
-        <p:nvSpPr>
-          <p:cNvPr id="17" name="장식"/>
-          <p:cNvSpPr/>
-          <p:nvPr/>
-        </p:nvSpPr>
-        <p:spPr>
-          <a:xfrm rot="6720000">
-            <a:off x="4326030" y="2054626"/>
-            <a:ext cx="171093" cy="266145"/>
-          </a:xfrm>
-          <a:prstGeom prst="ellipse">
-            <a:avLst/>
-          </a:prstGeom>
-          <a:solidFill>
-            <a:srgbClr val="EED3E0"/>
-          </a:solidFill>
-          <a:ln>
-            <a:noFill/>
-          </a:ln>
-        </p:spPr>
-        <p:txBody>
-          <a:bodyPr rtlCol="0" anchor="ctr"/>
-          <a:lstStyle/>
-          <a:p>
-            <a:pPr algn="ctr"/>
-          </a:p>
-        </p:txBody>
-      </p:sp>
-      <p:sp>
-        <p:nvSpPr>
-          <p:cNvPr id="18" name="장식"/>
-          <p:cNvSpPr/>
-          <p:nvPr/>
-        </p:nvSpPr>
-        <p:spPr>
-          <a:xfrm rot="11040000">
-            <a:off x="4161778" y="2157262"/>
-            <a:ext cx="171093" cy="266145"/>
-          </a:xfrm>
-          <a:prstGeom prst="ellipse">
-            <a:avLst/>
-          </a:prstGeom>
-          <a:solidFill>
-            <a:srgbClr val="B8618C"/>
-          </a:solidFill>
-          <a:ln>
-            <a:noFill/>
-          </a:ln>
-        </p:spPr>
-        <p:txBody>
-          <a:bodyPr rtlCol="0" anchor="ctr"/>
-          <a:lstStyle/>
-          <a:p>
-            <a:pPr algn="ctr"/>
-          </a:p>
-        </p:txBody>
-      </p:sp>
-      <p:sp>
-        <p:nvSpPr>
-          <p:cNvPr id="19" name="장식"/>
-          <p:cNvSpPr/>
-          <p:nvPr/>
-        </p:nvSpPr>
-        <p:spPr>
-          <a:xfrm rot="15360000">
-            <a:off x="4013408" y="2032765"/>
-            <a:ext cx="171093" cy="266145"/>
-          </a:xfrm>
-          <a:prstGeom prst="ellipse">
-            <a:avLst/>
-          </a:prstGeom>
-          <a:solidFill>
-            <a:srgbClr val="EED3E0"/>
-          </a:solidFill>
-          <a:ln>
-            <a:noFill/>
-          </a:ln>
-        </p:spPr>
-        <p:txBody>
-          <a:bodyPr rtlCol="0" anchor="ctr"/>
-          <a:lstStyle/>
-          <a:p>
-            <a:pPr algn="ctr"/>
-          </a:p>
-        </p:txBody>
-      </p:sp>
-      <p:sp>
-        <p:nvSpPr>
-          <p:cNvPr id="20" name="장식"/>
-          <p:cNvSpPr/>
-          <p:nvPr/>
-        </p:nvSpPr>
-        <p:spPr>
-          <a:xfrm rot="19680000">
-            <a:off x="4085963" y="1853185"/>
-            <a:ext cx="171093" cy="266145"/>
-          </a:xfrm>
-          <a:prstGeom prst="ellipse">
-            <a:avLst/>
-          </a:prstGeom>
-          <a:solidFill>
-            <a:srgbClr val="B8618C"/>
-          </a:solidFill>
-          <a:ln>
-            <a:noFill/>
-          </a:ln>
-        </p:spPr>
-        <p:txBody>
-          <a:bodyPr rtlCol="0" anchor="ctr"/>
-          <a:lstStyle/>
-          <a:p>
-            <a:pPr algn="ctr"/>
-          </a:p>
-        </p:txBody>
-      </p:sp>
-      <p:sp>
-        <p:nvSpPr>
-          <p:cNvPr id="21" name="장식"/>
-          <p:cNvSpPr/>
-          <p:nvPr/>
-        </p:nvSpPr>
-        <p:spPr>
-          <a:xfrm>
-            <a:off x="4201786" y="2068948"/>
-            <a:ext cx="114062" cy="114062"/>
-          </a:xfrm>
-          <a:prstGeom prst="ellipse">
-            <a:avLst/>
-          </a:prstGeom>
-          <a:solidFill>
-            <a:srgbClr val="3F8D3F"/>
-          </a:solidFill>
-          <a:ln>
-            <a:noFill/>
-          </a:ln>
-        </p:spPr>
-        <p:txBody>
-          <a:bodyPr rtlCol="0" anchor="ctr"/>
-          <a:lstStyle/>
-          <a:p>
-            <a:pPr algn="ctr"/>
-          </a:p>
-        </p:txBody>
-      </p:sp>
+        </p:spPr>
+      </p:pic>
       <p:sp>
         <p:nvSpPr>
           <p:cNvPr id="2" name="Title 1"/>
@@ -8215,8 +4531,8 @@
         </p:nvSpPr>
         <p:spPr>
           <a:xfrm>
-            <a:off x="822959" y="2263140"/>
-            <a:ext cx="5212080" cy="1371600"/>
+            <a:off x="685800" y="960120"/>
+            <a:ext cx="5486400" cy="1463040"/>
           </a:xfrm>
         </p:spPr>
         <p:txBody>
@@ -8225,7 +4541,7 @@
           </a:bodyPr>
           <a:lstStyle/>
           <a:p>
-            <a:pPr algn="ctr">
+            <a:pPr algn="l">
               <a:lnSpc>
                 <a:spcPct val="105000"/>
               </a:lnSpc>
@@ -8243,14 +4559,14 @@
       </p:sp>
       <p:sp>
         <p:nvSpPr>
-          <p:cNvPr id="22" name="한 줄 문구"/>
+          <p:cNvPr id="4" name="한 줄 문구"/>
           <p:cNvSpPr txBox="1"/>
           <p:nvPr/>
         </p:nvSpPr>
         <p:spPr>
           <a:xfrm>
-            <a:off x="822959" y="3726180"/>
-            <a:ext cx="5212080" cy="822960"/>
+            <a:off x="685800" y="2560320"/>
+            <a:ext cx="5486400" cy="822960"/>
           </a:xfrm>
           <a:prstGeom prst="rect">
             <a:avLst/>
@@ -8263,7 +4579,7 @@
           </a:bodyPr>
           <a:lstStyle/>
           <a:p>
-            <a:pPr algn="ctr">
+            <a:pPr algn="l">
               <a:lnSpc>
                 <a:spcPct val="115000"/>
               </a:lnSpc>
@@ -8281,14 +4597,14 @@
       </p:sp>
       <p:sp>
         <p:nvSpPr>
-          <p:cNvPr id="23" name="안내 문구"/>
+          <p:cNvPr id="5" name="안내 문구"/>
           <p:cNvSpPr txBox="1"/>
           <p:nvPr/>
         </p:nvSpPr>
         <p:spPr>
           <a:xfrm>
-            <a:off x="822959" y="4594860"/>
-            <a:ext cx="5212080" cy="914400"/>
+            <a:off x="685800" y="3429000"/>
+            <a:ext cx="5486400" cy="914400"/>
           </a:xfrm>
           <a:prstGeom prst="rect">
             <a:avLst/>
@@ -8301,7 +4617,7 @@
           </a:bodyPr>
           <a:lstStyle/>
           <a:p>
-            <a:pPr algn="ctr">
+            <a:pPr algn="l">
               <a:lnSpc>
                 <a:spcPct val="115000"/>
               </a:lnSpc>

--- a/public/fun/pack/pptx/news/카드뉴스_25_오늘의한마디_연꽃연못.pptx
+++ b/public/fun/pack/pptx/news/카드뉴스_25_오늘의한마디_연꽃연못.pptx
@@ -3348,7 +3348,7 @@
             <a:r>
               <a:rPr sz="3000" b="1" i="0">
                 <a:solidFill>
-                  <a:srgbClr val="7B3759"/>
+                  <a:srgbClr val="1D115F"/>
                 </a:solidFill>
               </a:rPr>
               <a:t>오늘은 일찍 자는 날로 정했습니다</a:t>
@@ -3386,7 +3386,7 @@
             <a:r>
               <a:rPr sz="1500" b="0" i="1">
                 <a:solidFill>
-                  <a:srgbClr val="7B3759"/>
+                  <a:srgbClr val="1D115F"/>
                 </a:solidFill>
               </a:rPr>
               <a:t>옆으로 넘겨 보세요 →</a:t>
@@ -3446,7 +3446,7 @@
     <p:bg>
       <p:bgPr>
         <a:solidFill>
-          <a:srgbClr val="B8618C"/>
+          <a:srgbClr val="3D26C5"/>
         </a:solidFill>
         <a:effectLst/>
       </p:bgPr>
@@ -3519,7 +3519,7 @@
             <a:r>
               <a:rPr sz="2600" b="1" i="0">
                 <a:solidFill>
-                  <a:srgbClr val="7B3759"/>
+                  <a:srgbClr val="1D115F"/>
                 </a:solidFill>
               </a:rPr>
               <a:t>점심은 거르지 마세요</a:t>
@@ -3557,7 +3557,7 @@
             <a:r>
               <a:rPr sz="6600" b="1" i="0">
                 <a:solidFill>
-                  <a:srgbClr val="B8618C"/>
+                  <a:srgbClr val="3D26C5"/>
                 </a:solidFill>
               </a:rPr>
               <a:t>01</a:t>
@@ -3655,7 +3655,7 @@
     <p:bg>
       <p:bgPr>
         <a:solidFill>
-          <a:srgbClr val="B8618C"/>
+          <a:srgbClr val="3D26C5"/>
         </a:solidFill>
         <a:effectLst/>
       </p:bgPr>
@@ -3728,7 +3728,7 @@
             <a:r>
               <a:rPr sz="2600" b="1" i="0">
                 <a:solidFill>
-                  <a:srgbClr val="7B3759"/>
+                  <a:srgbClr val="1D115F"/>
                 </a:solidFill>
               </a:rPr>
               <a:t>전화 한 통 걸어 보세요</a:t>
@@ -3766,7 +3766,7 @@
             <a:r>
               <a:rPr sz="6600" b="1" i="0">
                 <a:solidFill>
-                  <a:srgbClr val="B8618C"/>
+                  <a:srgbClr val="3D26C5"/>
                 </a:solidFill>
               </a:rPr>
               <a:t>02</a:t>
@@ -3864,7 +3864,7 @@
     <p:bg>
       <p:bgPr>
         <a:solidFill>
-          <a:srgbClr val="B8618C"/>
+          <a:srgbClr val="3D26C5"/>
         </a:solidFill>
         <a:effectLst/>
       </p:bgPr>
@@ -3937,7 +3937,7 @@
             <a:r>
               <a:rPr sz="2600" b="1" i="0">
                 <a:solidFill>
-                  <a:srgbClr val="7B3759"/>
+                  <a:srgbClr val="1D115F"/>
                 </a:solidFill>
               </a:rPr>
               <a:t>메모 한 장 남기기</a:t>
@@ -3975,7 +3975,7 @@
             <a:r>
               <a:rPr sz="6600" b="1" i="0">
                 <a:solidFill>
-                  <a:srgbClr val="B8618C"/>
+                  <a:srgbClr val="3D26C5"/>
                 </a:solidFill>
               </a:rPr>
               <a:t>03</a:t>
@@ -4073,7 +4073,7 @@
     <p:bg>
       <p:bgPr>
         <a:solidFill>
-          <a:srgbClr val="B8618C"/>
+          <a:srgbClr val="3D26C5"/>
         </a:solidFill>
         <a:effectLst/>
       </p:bgPr>
@@ -4146,7 +4146,7 @@
             <a:r>
               <a:rPr sz="2600" b="1" i="0">
                 <a:solidFill>
-                  <a:srgbClr val="7B3759"/>
+                  <a:srgbClr val="1D115F"/>
                 </a:solidFill>
               </a:rPr>
               <a:t>퇴근길 한 정거장 걷기</a:t>
@@ -4184,7 +4184,7 @@
             <a:r>
               <a:rPr sz="6600" b="1" i="0">
                 <a:solidFill>
-                  <a:srgbClr val="B8618C"/>
+                  <a:srgbClr val="3D26C5"/>
                 </a:solidFill>
               </a:rPr>
               <a:t>04</a:t>
@@ -4282,7 +4282,7 @@
     <p:bg>
       <p:bgPr>
         <a:solidFill>
-          <a:srgbClr val="B8618C"/>
+          <a:srgbClr val="3D26C5"/>
         </a:solidFill>
         <a:effectLst/>
       </p:bgPr>
@@ -4355,7 +4355,7 @@
             <a:r>
               <a:rPr sz="2600" b="1" i="0">
                 <a:solidFill>
-                  <a:srgbClr val="7B3759"/>
+                  <a:srgbClr val="1D115F"/>
                 </a:solidFill>
               </a:rPr>
               <a:t>오늘은 일찍 자기</a:t>
@@ -4393,7 +4393,7 @@
             <a:r>
               <a:rPr sz="6600" b="1" i="0">
                 <a:solidFill>
-                  <a:srgbClr val="B8618C"/>
+                  <a:srgbClr val="3D26C5"/>
                 </a:solidFill>
               </a:rPr>
               <a:t>05</a:t>
@@ -4549,7 +4549,7 @@
             <a:r>
               <a:rPr sz="2800" b="1" i="0">
                 <a:solidFill>
-                  <a:srgbClr val="7B3759"/>
+                  <a:srgbClr val="1D115F"/>
                 </a:solidFill>
               </a:rPr>
               <a:t>저장해 두고 필요할 때 꺼내 보세요</a:t>
@@ -4587,7 +4587,7 @@
             <a:r>
               <a:rPr sz="1500" b="0" i="1">
                 <a:solidFill>
-                  <a:srgbClr val="7B3759"/>
+                  <a:srgbClr val="1D115F"/>
                 </a:solidFill>
               </a:rPr>
               <a:t>마음에 들면 공유해 주세요</a:t>
@@ -4652,34 +4652,34 @@
         <a:sysClr val="window" lastClr="FFFFFF"/>
       </a:lt1>
       <a:dk2>
-        <a:srgbClr val="7B3759"/>
+        <a:srgbClr val="1D115F"/>
       </a:dk2>
       <a:lt2>
-        <a:srgbClr val="F9F1F5"/>
+        <a:srgbClr val="F0EEFC"/>
       </a:lt2>
       <a:accent1>
-        <a:srgbClr val="B8618C"/>
+        <a:srgbClr val="3D26C5"/>
       </a:accent1>
       <a:accent2>
-        <a:srgbClr val="3F8D3F"/>
+        <a:srgbClr val="209DB6"/>
       </a:accent2>
       <a:accent3>
-        <a:srgbClr val="7B3759"/>
+        <a:srgbClr val="1D115F"/>
       </a:accent3>
       <a:accent4>
-        <a:srgbClr val="EED3E0"/>
+        <a:srgbClr val="D7D1FA"/>
       </a:accent4>
       <a:accent5>
-        <a:srgbClr val="7C7766"/>
+        <a:srgbClr val="2E62BE"/>
       </a:accent5>
       <a:accent6>
-        <a:srgbClr val="B0879B"/>
+        <a:srgbClr val="77709F"/>
       </a:accent6>
       <a:hlink>
-        <a:srgbClr val="B8618C"/>
+        <a:srgbClr val="3D26C5"/>
       </a:hlink>
       <a:folHlink>
-        <a:srgbClr val="7B3759"/>
+        <a:srgbClr val="1D115F"/>
       </a:folHlink>
     </a:clrScheme>
     <a:fontScheme name="Office">

--- a/public/fun/pack/pptx/news/카드뉴스_25_오늘의한마디_연꽃연못.pptx
+++ b/public/fun/pack/pptx/news/카드뉴스_25_오늘의한마디_연꽃연못.pptx
@@ -3287,6 +3287,14 @@
 <file path=ppt/slides/slide1.xml><?xml version="1.0" encoding="utf-8"?>
 <p:sld xmlns:a="http://schemas.openxmlformats.org/drawingml/2006/main" xmlns:p="http://schemas.openxmlformats.org/presentationml/2006/main" xmlns:r="http://schemas.openxmlformats.org/officeDocument/2006/relationships">
   <p:cSld>
+    <p:bg>
+      <p:bgPr>
+        <a:solidFill>
+          <a:srgbClr val="492738"/>
+        </a:solidFill>
+        <a:effectLst/>
+      </p:bgPr>
+    </p:bg>
     <p:spTree>
       <p:nvGrpSpPr>
         <p:cNvPr id="1" name=""/>
@@ -3294,30 +3302,102 @@
         <p:nvPr/>
       </p:nvGrpSpPr>
       <p:grpSpPr/>
-      <p:pic>
-        <p:nvPicPr>
-          <p:cNvPr id="3" name="표지 그림" descr="news-25.jpg"/>
-          <p:cNvPicPr>
-            <a:picLocks noChangeAspect="1"/>
-          </p:cNvPicPr>
+      <p:sp>
+        <p:nvSpPr>
+          <p:cNvPr id="3" name="장식"/>
+          <p:cNvSpPr/>
           <p:nvPr/>
-        </p:nvPicPr>
-        <p:blipFill>
-          <a:blip r:embed="rId2"/>
-          <a:stretch>
-            <a:fillRect/>
-          </a:stretch>
-        </p:blipFill>
-        <p:spPr>
-          <a:xfrm>
-            <a:off x="0" y="0"/>
-            <a:ext cx="6858000" cy="6858000"/>
+        </p:nvSpPr>
+        <p:spPr>
+          <a:xfrm>
+            <a:off x="1600200" y="822960"/>
+            <a:ext cx="3657600" cy="3657600"/>
+          </a:xfrm>
+          <a:prstGeom prst="ellipse">
+            <a:avLst/>
+          </a:prstGeom>
+          <a:solidFill>
+            <a:srgbClr val="EA7BB3"/>
+          </a:solidFill>
+          <a:ln>
+            <a:noFill/>
+          </a:ln>
+        </p:spPr>
+        <p:txBody>
+          <a:bodyPr rtlCol="0" anchor="ctr"/>
+          <a:lstStyle/>
+          <a:p>
+            <a:pPr algn="ctr"/>
+          </a:p>
+        </p:txBody>
+      </p:sp>
+      <p:sp>
+        <p:nvSpPr>
+          <p:cNvPr id="4" name="장식"/>
+          <p:cNvSpPr/>
+          <p:nvPr/>
+        </p:nvSpPr>
+        <p:spPr>
+          <a:xfrm>
+            <a:off x="3246120" y="502920"/>
+            <a:ext cx="822960" cy="822960"/>
+          </a:xfrm>
+          <a:prstGeom prst="ellipse">
+            <a:avLst/>
+          </a:prstGeom>
+          <a:solidFill>
+            <a:srgbClr val="B25E88"/>
+          </a:solidFill>
+          <a:ln>
+            <a:noFill/>
+          </a:ln>
+        </p:spPr>
+        <p:txBody>
+          <a:bodyPr rtlCol="0" anchor="ctr"/>
+          <a:lstStyle/>
+          <a:p>
+            <a:pPr algn="ctr"/>
+          </a:p>
+        </p:txBody>
+      </p:sp>
+      <p:sp>
+        <p:nvSpPr>
+          <p:cNvPr id="5" name="라벨"/>
+          <p:cNvSpPr txBox="1"/>
+          <p:nvPr/>
+        </p:nvSpPr>
+        <p:spPr>
+          <a:xfrm>
+            <a:off x="731520" y="4572000"/>
+            <a:ext cx="5394960" cy="274320"/>
           </a:xfrm>
           <a:prstGeom prst="rect">
             <a:avLst/>
           </a:prstGeom>
-        </p:spPr>
-      </p:pic>
+          <a:noFill/>
+        </p:spPr>
+        <p:txBody>
+          <a:bodyPr wrap="square" lIns="54864" rIns="54864" tIns="27432" bIns="27432" anchor="t">
+            <a:noAutofit/>
+          </a:bodyPr>
+          <a:lstStyle/>
+          <a:p>
+            <a:pPr algn="ctr">
+              <a:lnSpc>
+                <a:spcPct val="115000"/>
+              </a:lnSpc>
+            </a:pPr>
+            <a:r>
+              <a:rPr sz="1000" b="1" i="0" spc="250">
+                <a:solidFill>
+                  <a:srgbClr val="FFFFFF"/>
+                </a:solidFill>
+              </a:rPr>
+              <a:t>CARD NEWS</a:t>
+            </a:r>
+          </a:p>
+        </p:txBody>
+      </p:sp>
       <p:sp>
         <p:nvSpPr>
           <p:cNvPr id="2" name="Title 1"/>
@@ -3330,8 +3410,8 @@
         </p:nvSpPr>
         <p:spPr>
           <a:xfrm>
-            <a:off x="685800" y="960120"/>
-            <a:ext cx="5486400" cy="1463040"/>
+            <a:off x="731520" y="4892040"/>
+            <a:ext cx="5394960" cy="914400"/>
           </a:xfrm>
         </p:spPr>
         <p:txBody>
@@ -3340,7 +3420,7 @@
           </a:bodyPr>
           <a:lstStyle/>
           <a:p>
-            <a:pPr algn="l">
+            <a:pPr algn="ctr">
               <a:lnSpc>
                 <a:spcPct val="105000"/>
               </a:lnSpc>
@@ -3348,7 +3428,7 @@
             <a:r>
               <a:rPr sz="3000" b="1" i="0">
                 <a:solidFill>
-                  <a:srgbClr val="1F1268"/>
+                  <a:srgbClr val="FFFFFF"/>
                 </a:solidFill>
               </a:rPr>
               <a:t>오늘은 일찍 자는 날로 정했습니다</a:t>
@@ -3358,14 +3438,14 @@
       </p:sp>
       <p:sp>
         <p:nvSpPr>
-          <p:cNvPr id="4" name="한 줄 문구"/>
+          <p:cNvPr id="6" name="한 줄 문구"/>
           <p:cNvSpPr txBox="1"/>
           <p:nvPr/>
         </p:nvSpPr>
         <p:spPr>
           <a:xfrm>
-            <a:off x="685800" y="2560320"/>
-            <a:ext cx="5486400" cy="822960"/>
+            <a:off x="731520" y="5806440"/>
+            <a:ext cx="5394960" cy="822960"/>
           </a:xfrm>
           <a:prstGeom prst="rect">
             <a:avLst/>
@@ -3378,15 +3458,15 @@
           </a:bodyPr>
           <a:lstStyle/>
           <a:p>
-            <a:pPr algn="l">
+            <a:pPr algn="ctr">
               <a:lnSpc>
                 <a:spcPct val="115000"/>
               </a:lnSpc>
             </a:pPr>
             <a:r>
-              <a:rPr sz="1500" b="0" i="1">
+              <a:rPr sz="1500" b="0" i="0">
                 <a:solidFill>
-                  <a:srgbClr val="1F1268"/>
+                  <a:srgbClr val="FFFFFF"/>
                 </a:solidFill>
               </a:rPr>
               <a:t>옆으로 넘겨 보세요 →</a:t>
@@ -3396,14 +3476,14 @@
       </p:sp>
       <p:sp>
         <p:nvSpPr>
-          <p:cNvPr id="5" name="안내 문구"/>
+          <p:cNvPr id="7" name="안내 문구"/>
           <p:cNvSpPr txBox="1"/>
           <p:nvPr/>
         </p:nvSpPr>
         <p:spPr>
           <a:xfrm>
-            <a:off x="685800" y="3429000"/>
-            <a:ext cx="5486400" cy="914400"/>
+            <a:off x="731520" y="6675120"/>
+            <a:ext cx="5394960" cy="914400"/>
           </a:xfrm>
           <a:prstGeom prst="rect">
             <a:avLst/>
@@ -3416,7 +3496,7 @@
           </a:bodyPr>
           <a:lstStyle/>
           <a:p>
-            <a:pPr algn="l">
+            <a:pPr algn="ctr">
               <a:lnSpc>
                 <a:spcPct val="115000"/>
               </a:lnSpc>
@@ -3424,7 +3504,7 @@
             <a:r>
               <a:rPr sz="1200" b="0" i="0">
                 <a:solidFill>
-                  <a:srgbClr val="666666"/>
+                  <a:srgbClr val="FFFFFF"/>
                 </a:solidFill>
               </a:rPr>
               <a:t>오늘의 한마디 · 카드뉴스</a:t>
@@ -3446,7 +3526,7 @@
     <p:bg>
       <p:bgPr>
         <a:solidFill>
-          <a:srgbClr val="563EE0"/>
+          <a:srgbClr val="FDEAF4"/>
         </a:solidFill>
         <a:effectLst/>
       </p:bgPr>
@@ -3466,16 +3546,16 @@
         </p:nvSpPr>
         <p:spPr>
           <a:xfrm>
-            <a:off x="274320" y="274320"/>
-            <a:ext cx="6309360" cy="6309360"/>
+            <a:off x="640080" y="566928"/>
+            <a:ext cx="64008" cy="868680"/>
           </a:xfrm>
           <a:prstGeom prst="roundRect">
             <a:avLst>
-              <a:gd name="adj" fmla="val 3500"/>
+              <a:gd name="adj" fmla="val 50000"/>
             </a:avLst>
           </a:prstGeom>
           <a:solidFill>
-            <a:srgbClr val="FFFFFF"/>
+            <a:srgbClr val="EA7BB3"/>
           </a:solidFill>
           <a:ln>
             <a:noFill/>
@@ -3491,6 +3571,73 @@
       </p:sp>
       <p:sp>
         <p:nvSpPr>
+          <p:cNvPr id="4" name="상단 라벨"/>
+          <p:cNvSpPr txBox="1"/>
+          <p:nvPr/>
+        </p:nvSpPr>
+        <p:spPr>
+          <a:xfrm>
+            <a:off x="868680" y="274320"/>
+            <a:ext cx="5486400" cy="274320"/>
+          </a:xfrm>
+          <a:prstGeom prst="rect">
+            <a:avLst/>
+          </a:prstGeom>
+          <a:noFill/>
+        </p:spPr>
+        <p:txBody>
+          <a:bodyPr wrap="square" lIns="54864" rIns="54864" tIns="27432" bIns="27432" anchor="ctr">
+            <a:noAutofit/>
+          </a:bodyPr>
+          <a:lstStyle/>
+          <a:p>
+            <a:pPr algn="l">
+              <a:lnSpc>
+                <a:spcPct val="115000"/>
+              </a:lnSpc>
+            </a:pPr>
+            <a:r>
+              <a:rPr sz="900" b="1" i="0" spc="250">
+                <a:solidFill>
+                  <a:srgbClr val="8E8780"/>
+                </a:solidFill>
+              </a:rPr>
+              <a:t>CARD NEWS</a:t>
+            </a:r>
+          </a:p>
+        </p:txBody>
+      </p:sp>
+      <p:sp>
+        <p:nvSpPr>
+          <p:cNvPr id="5" name="포인트"/>
+          <p:cNvSpPr/>
+          <p:nvPr/>
+        </p:nvSpPr>
+        <p:spPr>
+          <a:xfrm>
+            <a:off x="5833872" y="667512"/>
+            <a:ext cx="310896" cy="124358"/>
+          </a:xfrm>
+          <a:prstGeom prst="wave">
+            <a:avLst/>
+          </a:prstGeom>
+          <a:solidFill>
+            <a:srgbClr val="F3A5CC"/>
+          </a:solidFill>
+          <a:ln>
+            <a:noFill/>
+          </a:ln>
+        </p:spPr>
+        <p:txBody>
+          <a:bodyPr rtlCol="0" anchor="ctr"/>
+          <a:lstStyle/>
+          <a:p>
+            <a:pPr algn="ctr"/>
+          </a:p>
+        </p:txBody>
+      </p:sp>
+      <p:sp>
+        <p:nvSpPr>
           <p:cNvPr id="2" name="Title 1"/>
           <p:cNvSpPr>
             <a:spLocks noGrp="1"/>
@@ -3501,7 +3648,7 @@
         </p:nvSpPr>
         <p:spPr>
           <a:xfrm>
-            <a:off x="731520" y="548640"/>
+            <a:off x="868680" y="566928"/>
             <a:ext cx="4114800" cy="868680"/>
           </a:xfrm>
         </p:spPr>
@@ -3519,7 +3666,7 @@
             <a:r>
               <a:rPr sz="2600" b="1" i="0">
                 <a:solidFill>
-                  <a:srgbClr val="1F1268"/>
+                  <a:srgbClr val="26231F"/>
                 </a:solidFill>
               </a:rPr>
               <a:t>점심은 거르지 마세요</a:t>
@@ -3529,13 +3676,13 @@
       </p:sp>
       <p:sp>
         <p:nvSpPr>
-          <p:cNvPr id="4" name="번호"/>
+          <p:cNvPr id="6" name="번호"/>
           <p:cNvSpPr txBox="1"/>
           <p:nvPr/>
         </p:nvSpPr>
         <p:spPr>
           <a:xfrm>
-            <a:off x="731520" y="1691640"/>
+            <a:off x="640080" y="1874519"/>
             <a:ext cx="2194560" cy="1280160"/>
           </a:xfrm>
           <a:prstGeom prst="rect">
@@ -3557,7 +3704,7 @@
             <a:r>
               <a:rPr sz="6600" b="1" i="0">
                 <a:solidFill>
-                  <a:srgbClr val="563EE0"/>
+                  <a:srgbClr val="EA7BB3"/>
                 </a:solidFill>
               </a:rPr>
               <a:t>01</a:t>
@@ -3567,14 +3714,14 @@
       </p:sp>
       <p:sp>
         <p:nvSpPr>
-          <p:cNvPr id="5" name="본문"/>
+          <p:cNvPr id="7" name="본문"/>
           <p:cNvSpPr txBox="1"/>
           <p:nvPr/>
         </p:nvSpPr>
         <p:spPr>
           <a:xfrm>
-            <a:off x="731520" y="3154680"/>
-            <a:ext cx="5394960" cy="2651760"/>
+            <a:off x="640080" y="3337560"/>
+            <a:ext cx="5577840" cy="2651760"/>
           </a:xfrm>
           <a:prstGeom prst="rect">
             <a:avLst/>
@@ -3595,7 +3742,7 @@
             <a:r>
               <a:rPr sz="2800" b="0" i="0">
                 <a:solidFill>
-                  <a:srgbClr val="2B2B2B"/>
+                  <a:srgbClr val="26231F"/>
                 </a:solidFill>
               </a:rPr>
               <a:t>바빠도 한 끼는 앉아서 먹어요. 오후가 달라져요.</a:t>
@@ -3605,14 +3752,14 @@
       </p:sp>
       <p:sp>
         <p:nvSpPr>
-          <p:cNvPr id="6" name="쪽 번호"/>
+          <p:cNvPr id="8" name="쪽 번호"/>
           <p:cNvSpPr txBox="1"/>
           <p:nvPr/>
         </p:nvSpPr>
         <p:spPr>
           <a:xfrm>
-            <a:off x="731520" y="5852159"/>
-            <a:ext cx="5394960" cy="365760"/>
+            <a:off x="640080" y="5989320"/>
+            <a:ext cx="5577840" cy="365760"/>
           </a:xfrm>
           <a:prstGeom prst="rect">
             <a:avLst/>
@@ -3655,7 +3802,7 @@
     <p:bg>
       <p:bgPr>
         <a:solidFill>
-          <a:srgbClr val="563EE0"/>
+          <a:srgbClr val="FDEAF4"/>
         </a:solidFill>
         <a:effectLst/>
       </p:bgPr>
@@ -3675,16 +3822,16 @@
         </p:nvSpPr>
         <p:spPr>
           <a:xfrm>
-            <a:off x="274320" y="274320"/>
-            <a:ext cx="6309360" cy="6309360"/>
+            <a:off x="640080" y="566928"/>
+            <a:ext cx="64008" cy="868680"/>
           </a:xfrm>
           <a:prstGeom prst="roundRect">
             <a:avLst>
-              <a:gd name="adj" fmla="val 3500"/>
+              <a:gd name="adj" fmla="val 50000"/>
             </a:avLst>
           </a:prstGeom>
           <a:solidFill>
-            <a:srgbClr val="FFFFFF"/>
+            <a:srgbClr val="EA7BB3"/>
           </a:solidFill>
           <a:ln>
             <a:noFill/>
@@ -3700,6 +3847,73 @@
       </p:sp>
       <p:sp>
         <p:nvSpPr>
+          <p:cNvPr id="4" name="상단 라벨"/>
+          <p:cNvSpPr txBox="1"/>
+          <p:nvPr/>
+        </p:nvSpPr>
+        <p:spPr>
+          <a:xfrm>
+            <a:off x="868680" y="274320"/>
+            <a:ext cx="5486400" cy="274320"/>
+          </a:xfrm>
+          <a:prstGeom prst="rect">
+            <a:avLst/>
+          </a:prstGeom>
+          <a:noFill/>
+        </p:spPr>
+        <p:txBody>
+          <a:bodyPr wrap="square" lIns="54864" rIns="54864" tIns="27432" bIns="27432" anchor="ctr">
+            <a:noAutofit/>
+          </a:bodyPr>
+          <a:lstStyle/>
+          <a:p>
+            <a:pPr algn="l">
+              <a:lnSpc>
+                <a:spcPct val="115000"/>
+              </a:lnSpc>
+            </a:pPr>
+            <a:r>
+              <a:rPr sz="900" b="1" i="0" spc="250">
+                <a:solidFill>
+                  <a:srgbClr val="8E8780"/>
+                </a:solidFill>
+              </a:rPr>
+              <a:t>CARD NEWS</a:t>
+            </a:r>
+          </a:p>
+        </p:txBody>
+      </p:sp>
+      <p:sp>
+        <p:nvSpPr>
+          <p:cNvPr id="5" name="포인트"/>
+          <p:cNvSpPr/>
+          <p:nvPr/>
+        </p:nvSpPr>
+        <p:spPr>
+          <a:xfrm>
+            <a:off x="5833872" y="667512"/>
+            <a:ext cx="310896" cy="124358"/>
+          </a:xfrm>
+          <a:prstGeom prst="wave">
+            <a:avLst/>
+          </a:prstGeom>
+          <a:solidFill>
+            <a:srgbClr val="F3A5CC"/>
+          </a:solidFill>
+          <a:ln>
+            <a:noFill/>
+          </a:ln>
+        </p:spPr>
+        <p:txBody>
+          <a:bodyPr rtlCol="0" anchor="ctr"/>
+          <a:lstStyle/>
+          <a:p>
+            <a:pPr algn="ctr"/>
+          </a:p>
+        </p:txBody>
+      </p:sp>
+      <p:sp>
+        <p:nvSpPr>
           <p:cNvPr id="2" name="Title 1"/>
           <p:cNvSpPr>
             <a:spLocks noGrp="1"/>
@@ -3710,7 +3924,7 @@
         </p:nvSpPr>
         <p:spPr>
           <a:xfrm>
-            <a:off x="731520" y="548640"/>
+            <a:off x="868680" y="566928"/>
             <a:ext cx="4114800" cy="868680"/>
           </a:xfrm>
         </p:spPr>
@@ -3728,7 +3942,7 @@
             <a:r>
               <a:rPr sz="2600" b="1" i="0">
                 <a:solidFill>
-                  <a:srgbClr val="1F1268"/>
+                  <a:srgbClr val="26231F"/>
                 </a:solidFill>
               </a:rPr>
               <a:t>전화 한 통 걸어 보세요</a:t>
@@ -3738,13 +3952,13 @@
       </p:sp>
       <p:sp>
         <p:nvSpPr>
-          <p:cNvPr id="4" name="번호"/>
+          <p:cNvPr id="6" name="번호"/>
           <p:cNvSpPr txBox="1"/>
           <p:nvPr/>
         </p:nvSpPr>
         <p:spPr>
           <a:xfrm>
-            <a:off x="731520" y="1691640"/>
+            <a:off x="640080" y="1874519"/>
             <a:ext cx="2194560" cy="1280160"/>
           </a:xfrm>
           <a:prstGeom prst="rect">
@@ -3766,7 +3980,7 @@
             <a:r>
               <a:rPr sz="6600" b="1" i="0">
                 <a:solidFill>
-                  <a:srgbClr val="563EE0"/>
+                  <a:srgbClr val="EA7BB3"/>
                 </a:solidFill>
               </a:rPr>
               <a:t>02</a:t>
@@ -3776,14 +3990,14 @@
       </p:sp>
       <p:sp>
         <p:nvSpPr>
-          <p:cNvPr id="5" name="본문"/>
+          <p:cNvPr id="7" name="본문"/>
           <p:cNvSpPr txBox="1"/>
           <p:nvPr/>
         </p:nvSpPr>
         <p:spPr>
           <a:xfrm>
-            <a:off x="731520" y="3154680"/>
-            <a:ext cx="5394960" cy="2651760"/>
+            <a:off x="640080" y="3337560"/>
+            <a:ext cx="5577840" cy="2651760"/>
           </a:xfrm>
           <a:prstGeom prst="rect">
             <a:avLst/>
@@ -3804,7 +4018,7 @@
             <a:r>
               <a:rPr sz="2800" b="0" i="0">
                 <a:solidFill>
-                  <a:srgbClr val="2B2B2B"/>
+                  <a:srgbClr val="26231F"/>
                 </a:solidFill>
               </a:rPr>
               <a:t>문자보다 목소리가 먼저 떠오르는 사람이 있다면 지금 걸어 보세요.</a:t>
@@ -3814,14 +4028,14 @@
       </p:sp>
       <p:sp>
         <p:nvSpPr>
-          <p:cNvPr id="6" name="쪽 번호"/>
+          <p:cNvPr id="8" name="쪽 번호"/>
           <p:cNvSpPr txBox="1"/>
           <p:nvPr/>
         </p:nvSpPr>
         <p:spPr>
           <a:xfrm>
-            <a:off x="731520" y="5852159"/>
-            <a:ext cx="5394960" cy="365760"/>
+            <a:off x="640080" y="5989320"/>
+            <a:ext cx="5577840" cy="365760"/>
           </a:xfrm>
           <a:prstGeom prst="rect">
             <a:avLst/>
@@ -3864,7 +4078,7 @@
     <p:bg>
       <p:bgPr>
         <a:solidFill>
-          <a:srgbClr val="563EE0"/>
+          <a:srgbClr val="FDEAF4"/>
         </a:solidFill>
         <a:effectLst/>
       </p:bgPr>
@@ -3884,16 +4098,16 @@
         </p:nvSpPr>
         <p:spPr>
           <a:xfrm>
-            <a:off x="274320" y="274320"/>
-            <a:ext cx="6309360" cy="6309360"/>
+            <a:off x="640080" y="566928"/>
+            <a:ext cx="64008" cy="868680"/>
           </a:xfrm>
           <a:prstGeom prst="roundRect">
             <a:avLst>
-              <a:gd name="adj" fmla="val 3500"/>
+              <a:gd name="adj" fmla="val 50000"/>
             </a:avLst>
           </a:prstGeom>
           <a:solidFill>
-            <a:srgbClr val="FFFFFF"/>
+            <a:srgbClr val="EA7BB3"/>
           </a:solidFill>
           <a:ln>
             <a:noFill/>
@@ -3909,6 +4123,73 @@
       </p:sp>
       <p:sp>
         <p:nvSpPr>
+          <p:cNvPr id="4" name="상단 라벨"/>
+          <p:cNvSpPr txBox="1"/>
+          <p:nvPr/>
+        </p:nvSpPr>
+        <p:spPr>
+          <a:xfrm>
+            <a:off x="868680" y="274320"/>
+            <a:ext cx="5486400" cy="274320"/>
+          </a:xfrm>
+          <a:prstGeom prst="rect">
+            <a:avLst/>
+          </a:prstGeom>
+          <a:noFill/>
+        </p:spPr>
+        <p:txBody>
+          <a:bodyPr wrap="square" lIns="54864" rIns="54864" tIns="27432" bIns="27432" anchor="ctr">
+            <a:noAutofit/>
+          </a:bodyPr>
+          <a:lstStyle/>
+          <a:p>
+            <a:pPr algn="l">
+              <a:lnSpc>
+                <a:spcPct val="115000"/>
+              </a:lnSpc>
+            </a:pPr>
+            <a:r>
+              <a:rPr sz="900" b="1" i="0" spc="250">
+                <a:solidFill>
+                  <a:srgbClr val="8E8780"/>
+                </a:solidFill>
+              </a:rPr>
+              <a:t>CARD NEWS</a:t>
+            </a:r>
+          </a:p>
+        </p:txBody>
+      </p:sp>
+      <p:sp>
+        <p:nvSpPr>
+          <p:cNvPr id="5" name="포인트"/>
+          <p:cNvSpPr/>
+          <p:nvPr/>
+        </p:nvSpPr>
+        <p:spPr>
+          <a:xfrm>
+            <a:off x="5833872" y="667512"/>
+            <a:ext cx="310896" cy="124358"/>
+          </a:xfrm>
+          <a:prstGeom prst="wave">
+            <a:avLst/>
+          </a:prstGeom>
+          <a:solidFill>
+            <a:srgbClr val="F3A5CC"/>
+          </a:solidFill>
+          <a:ln>
+            <a:noFill/>
+          </a:ln>
+        </p:spPr>
+        <p:txBody>
+          <a:bodyPr rtlCol="0" anchor="ctr"/>
+          <a:lstStyle/>
+          <a:p>
+            <a:pPr algn="ctr"/>
+          </a:p>
+        </p:txBody>
+      </p:sp>
+      <p:sp>
+        <p:nvSpPr>
           <p:cNvPr id="2" name="Title 1"/>
           <p:cNvSpPr>
             <a:spLocks noGrp="1"/>
@@ -3919,7 +4200,7 @@
         </p:nvSpPr>
         <p:spPr>
           <a:xfrm>
-            <a:off x="731520" y="548640"/>
+            <a:off x="868680" y="566928"/>
             <a:ext cx="4114800" cy="868680"/>
           </a:xfrm>
         </p:spPr>
@@ -3937,7 +4218,7 @@
             <a:r>
               <a:rPr sz="2600" b="1" i="0">
                 <a:solidFill>
-                  <a:srgbClr val="1F1268"/>
+                  <a:srgbClr val="26231F"/>
                 </a:solidFill>
               </a:rPr>
               <a:t>메모 한 장 남기기</a:t>
@@ -3947,13 +4228,13 @@
       </p:sp>
       <p:sp>
         <p:nvSpPr>
-          <p:cNvPr id="4" name="번호"/>
+          <p:cNvPr id="6" name="번호"/>
           <p:cNvSpPr txBox="1"/>
           <p:nvPr/>
         </p:nvSpPr>
         <p:spPr>
           <a:xfrm>
-            <a:off x="731520" y="1691640"/>
+            <a:off x="640080" y="1874519"/>
             <a:ext cx="2194560" cy="1280160"/>
           </a:xfrm>
           <a:prstGeom prst="rect">
@@ -3975,7 +4256,7 @@
             <a:r>
               <a:rPr sz="6600" b="1" i="0">
                 <a:solidFill>
-                  <a:srgbClr val="563EE0"/>
+                  <a:srgbClr val="EA7BB3"/>
                 </a:solidFill>
               </a:rPr>
               <a:t>03</a:t>
@@ -3985,14 +4266,14 @@
       </p:sp>
       <p:sp>
         <p:nvSpPr>
-          <p:cNvPr id="5" name="본문"/>
+          <p:cNvPr id="7" name="본문"/>
           <p:cNvSpPr txBox="1"/>
           <p:nvPr/>
         </p:nvSpPr>
         <p:spPr>
           <a:xfrm>
-            <a:off x="731520" y="3154680"/>
-            <a:ext cx="5394960" cy="2651760"/>
+            <a:off x="640080" y="3337560"/>
+            <a:ext cx="5577840" cy="2651760"/>
           </a:xfrm>
           <a:prstGeom prst="rect">
             <a:avLst/>
@@ -4013,7 +4294,7 @@
             <a:r>
               <a:rPr sz="2800" b="0" i="0">
                 <a:solidFill>
-                  <a:srgbClr val="2B2B2B"/>
+                  <a:srgbClr val="26231F"/>
                 </a:solidFill>
               </a:rPr>
               <a:t>생각났을 때 적어 두면 다음 주의 내가 고마워해요.</a:t>
@@ -4023,14 +4304,14 @@
       </p:sp>
       <p:sp>
         <p:nvSpPr>
-          <p:cNvPr id="6" name="쪽 번호"/>
+          <p:cNvPr id="8" name="쪽 번호"/>
           <p:cNvSpPr txBox="1"/>
           <p:nvPr/>
         </p:nvSpPr>
         <p:spPr>
           <a:xfrm>
-            <a:off x="731520" y="5852159"/>
-            <a:ext cx="5394960" cy="365760"/>
+            <a:off x="640080" y="5989320"/>
+            <a:ext cx="5577840" cy="365760"/>
           </a:xfrm>
           <a:prstGeom prst="rect">
             <a:avLst/>
@@ -4073,7 +4354,7 @@
     <p:bg>
       <p:bgPr>
         <a:solidFill>
-          <a:srgbClr val="563EE0"/>
+          <a:srgbClr val="FDEAF4"/>
         </a:solidFill>
         <a:effectLst/>
       </p:bgPr>
@@ -4093,16 +4374,16 @@
         </p:nvSpPr>
         <p:spPr>
           <a:xfrm>
-            <a:off x="274320" y="274320"/>
-            <a:ext cx="6309360" cy="6309360"/>
+            <a:off x="640080" y="566928"/>
+            <a:ext cx="64008" cy="868680"/>
           </a:xfrm>
           <a:prstGeom prst="roundRect">
             <a:avLst>
-              <a:gd name="adj" fmla="val 3500"/>
+              <a:gd name="adj" fmla="val 50000"/>
             </a:avLst>
           </a:prstGeom>
           <a:solidFill>
-            <a:srgbClr val="FFFFFF"/>
+            <a:srgbClr val="EA7BB3"/>
           </a:solidFill>
           <a:ln>
             <a:noFill/>
@@ -4118,6 +4399,73 @@
       </p:sp>
       <p:sp>
         <p:nvSpPr>
+          <p:cNvPr id="4" name="상단 라벨"/>
+          <p:cNvSpPr txBox="1"/>
+          <p:nvPr/>
+        </p:nvSpPr>
+        <p:spPr>
+          <a:xfrm>
+            <a:off x="868680" y="274320"/>
+            <a:ext cx="5486400" cy="274320"/>
+          </a:xfrm>
+          <a:prstGeom prst="rect">
+            <a:avLst/>
+          </a:prstGeom>
+          <a:noFill/>
+        </p:spPr>
+        <p:txBody>
+          <a:bodyPr wrap="square" lIns="54864" rIns="54864" tIns="27432" bIns="27432" anchor="ctr">
+            <a:noAutofit/>
+          </a:bodyPr>
+          <a:lstStyle/>
+          <a:p>
+            <a:pPr algn="l">
+              <a:lnSpc>
+                <a:spcPct val="115000"/>
+              </a:lnSpc>
+            </a:pPr>
+            <a:r>
+              <a:rPr sz="900" b="1" i="0" spc="250">
+                <a:solidFill>
+                  <a:srgbClr val="8E8780"/>
+                </a:solidFill>
+              </a:rPr>
+              <a:t>CARD NEWS</a:t>
+            </a:r>
+          </a:p>
+        </p:txBody>
+      </p:sp>
+      <p:sp>
+        <p:nvSpPr>
+          <p:cNvPr id="5" name="포인트"/>
+          <p:cNvSpPr/>
+          <p:nvPr/>
+        </p:nvSpPr>
+        <p:spPr>
+          <a:xfrm>
+            <a:off x="5833872" y="667512"/>
+            <a:ext cx="310896" cy="124358"/>
+          </a:xfrm>
+          <a:prstGeom prst="wave">
+            <a:avLst/>
+          </a:prstGeom>
+          <a:solidFill>
+            <a:srgbClr val="F3A5CC"/>
+          </a:solidFill>
+          <a:ln>
+            <a:noFill/>
+          </a:ln>
+        </p:spPr>
+        <p:txBody>
+          <a:bodyPr rtlCol="0" anchor="ctr"/>
+          <a:lstStyle/>
+          <a:p>
+            <a:pPr algn="ctr"/>
+          </a:p>
+        </p:txBody>
+      </p:sp>
+      <p:sp>
+        <p:nvSpPr>
           <p:cNvPr id="2" name="Title 1"/>
           <p:cNvSpPr>
             <a:spLocks noGrp="1"/>
@@ -4128,7 +4476,7 @@
         </p:nvSpPr>
         <p:spPr>
           <a:xfrm>
-            <a:off x="731520" y="548640"/>
+            <a:off x="868680" y="566928"/>
             <a:ext cx="4114800" cy="868680"/>
           </a:xfrm>
         </p:spPr>
@@ -4146,7 +4494,7 @@
             <a:r>
               <a:rPr sz="2600" b="1" i="0">
                 <a:solidFill>
-                  <a:srgbClr val="1F1268"/>
+                  <a:srgbClr val="26231F"/>
                 </a:solidFill>
               </a:rPr>
               <a:t>퇴근길 한 정거장 걷기</a:t>
@@ -4156,13 +4504,13 @@
       </p:sp>
       <p:sp>
         <p:nvSpPr>
-          <p:cNvPr id="4" name="번호"/>
+          <p:cNvPr id="6" name="번호"/>
           <p:cNvSpPr txBox="1"/>
           <p:nvPr/>
         </p:nvSpPr>
         <p:spPr>
           <a:xfrm>
-            <a:off x="731520" y="1691640"/>
+            <a:off x="640080" y="1874519"/>
             <a:ext cx="2194560" cy="1280160"/>
           </a:xfrm>
           <a:prstGeom prst="rect">
@@ -4184,7 +4532,7 @@
             <a:r>
               <a:rPr sz="6600" b="1" i="0">
                 <a:solidFill>
-                  <a:srgbClr val="563EE0"/>
+                  <a:srgbClr val="EA7BB3"/>
                 </a:solidFill>
               </a:rPr>
               <a:t>04</a:t>
@@ -4194,14 +4542,14 @@
       </p:sp>
       <p:sp>
         <p:nvSpPr>
-          <p:cNvPr id="5" name="본문"/>
+          <p:cNvPr id="7" name="본문"/>
           <p:cNvSpPr txBox="1"/>
           <p:nvPr/>
         </p:nvSpPr>
         <p:spPr>
           <a:xfrm>
-            <a:off x="731520" y="3154680"/>
-            <a:ext cx="5394960" cy="2651760"/>
+            <a:off x="640080" y="3337560"/>
+            <a:ext cx="5577840" cy="2651760"/>
           </a:xfrm>
           <a:prstGeom prst="rect">
             <a:avLst/>
@@ -4222,7 +4570,7 @@
             <a:r>
               <a:rPr sz="2800" b="0" i="0">
                 <a:solidFill>
-                  <a:srgbClr val="2B2B2B"/>
+                  <a:srgbClr val="26231F"/>
                 </a:solidFill>
               </a:rPr>
               <a:t>한 정거장 먼저 내려 걸으면 머리가 정리돼요.</a:t>
@@ -4232,14 +4580,14 @@
       </p:sp>
       <p:sp>
         <p:nvSpPr>
-          <p:cNvPr id="6" name="쪽 번호"/>
+          <p:cNvPr id="8" name="쪽 번호"/>
           <p:cNvSpPr txBox="1"/>
           <p:nvPr/>
         </p:nvSpPr>
         <p:spPr>
           <a:xfrm>
-            <a:off x="731520" y="5852159"/>
-            <a:ext cx="5394960" cy="365760"/>
+            <a:off x="640080" y="5989320"/>
+            <a:ext cx="5577840" cy="365760"/>
           </a:xfrm>
           <a:prstGeom prst="rect">
             <a:avLst/>
@@ -4282,7 +4630,7 @@
     <p:bg>
       <p:bgPr>
         <a:solidFill>
-          <a:srgbClr val="563EE0"/>
+          <a:srgbClr val="FDEAF4"/>
         </a:solidFill>
         <a:effectLst/>
       </p:bgPr>
@@ -4302,16 +4650,16 @@
         </p:nvSpPr>
         <p:spPr>
           <a:xfrm>
-            <a:off x="274320" y="274320"/>
-            <a:ext cx="6309360" cy="6309360"/>
+            <a:off x="640080" y="566928"/>
+            <a:ext cx="64008" cy="868680"/>
           </a:xfrm>
           <a:prstGeom prst="roundRect">
             <a:avLst>
-              <a:gd name="adj" fmla="val 3500"/>
+              <a:gd name="adj" fmla="val 50000"/>
             </a:avLst>
           </a:prstGeom>
           <a:solidFill>
-            <a:srgbClr val="FFFFFF"/>
+            <a:srgbClr val="EA7BB3"/>
           </a:solidFill>
           <a:ln>
             <a:noFill/>
@@ -4327,6 +4675,73 @@
       </p:sp>
       <p:sp>
         <p:nvSpPr>
+          <p:cNvPr id="4" name="상단 라벨"/>
+          <p:cNvSpPr txBox="1"/>
+          <p:nvPr/>
+        </p:nvSpPr>
+        <p:spPr>
+          <a:xfrm>
+            <a:off x="868680" y="274320"/>
+            <a:ext cx="5486400" cy="274320"/>
+          </a:xfrm>
+          <a:prstGeom prst="rect">
+            <a:avLst/>
+          </a:prstGeom>
+          <a:noFill/>
+        </p:spPr>
+        <p:txBody>
+          <a:bodyPr wrap="square" lIns="54864" rIns="54864" tIns="27432" bIns="27432" anchor="ctr">
+            <a:noAutofit/>
+          </a:bodyPr>
+          <a:lstStyle/>
+          <a:p>
+            <a:pPr algn="l">
+              <a:lnSpc>
+                <a:spcPct val="115000"/>
+              </a:lnSpc>
+            </a:pPr>
+            <a:r>
+              <a:rPr sz="900" b="1" i="0" spc="250">
+                <a:solidFill>
+                  <a:srgbClr val="8E8780"/>
+                </a:solidFill>
+              </a:rPr>
+              <a:t>CARD NEWS</a:t>
+            </a:r>
+          </a:p>
+        </p:txBody>
+      </p:sp>
+      <p:sp>
+        <p:nvSpPr>
+          <p:cNvPr id="5" name="포인트"/>
+          <p:cNvSpPr/>
+          <p:nvPr/>
+        </p:nvSpPr>
+        <p:spPr>
+          <a:xfrm>
+            <a:off x="5833872" y="667512"/>
+            <a:ext cx="310896" cy="124358"/>
+          </a:xfrm>
+          <a:prstGeom prst="wave">
+            <a:avLst/>
+          </a:prstGeom>
+          <a:solidFill>
+            <a:srgbClr val="F3A5CC"/>
+          </a:solidFill>
+          <a:ln>
+            <a:noFill/>
+          </a:ln>
+        </p:spPr>
+        <p:txBody>
+          <a:bodyPr rtlCol="0" anchor="ctr"/>
+          <a:lstStyle/>
+          <a:p>
+            <a:pPr algn="ctr"/>
+          </a:p>
+        </p:txBody>
+      </p:sp>
+      <p:sp>
+        <p:nvSpPr>
           <p:cNvPr id="2" name="Title 1"/>
           <p:cNvSpPr>
             <a:spLocks noGrp="1"/>
@@ -4337,7 +4752,7 @@
         </p:nvSpPr>
         <p:spPr>
           <a:xfrm>
-            <a:off x="731520" y="548640"/>
+            <a:off x="868680" y="566928"/>
             <a:ext cx="4114800" cy="868680"/>
           </a:xfrm>
         </p:spPr>
@@ -4355,7 +4770,7 @@
             <a:r>
               <a:rPr sz="2600" b="1" i="0">
                 <a:solidFill>
-                  <a:srgbClr val="1F1268"/>
+                  <a:srgbClr val="26231F"/>
                 </a:solidFill>
               </a:rPr>
               <a:t>오늘은 일찍 자기</a:t>
@@ -4365,13 +4780,13 @@
       </p:sp>
       <p:sp>
         <p:nvSpPr>
-          <p:cNvPr id="4" name="번호"/>
+          <p:cNvPr id="6" name="번호"/>
           <p:cNvSpPr txBox="1"/>
           <p:nvPr/>
         </p:nvSpPr>
         <p:spPr>
           <a:xfrm>
-            <a:off x="731520" y="1691640"/>
+            <a:off x="640080" y="1874519"/>
             <a:ext cx="2194560" cy="1280160"/>
           </a:xfrm>
           <a:prstGeom prst="rect">
@@ -4393,7 +4808,7 @@
             <a:r>
               <a:rPr sz="6600" b="1" i="0">
                 <a:solidFill>
-                  <a:srgbClr val="563EE0"/>
+                  <a:srgbClr val="EA7BB3"/>
                 </a:solidFill>
               </a:rPr>
               <a:t>05</a:t>
@@ -4403,14 +4818,14 @@
       </p:sp>
       <p:sp>
         <p:nvSpPr>
-          <p:cNvPr id="5" name="본문"/>
+          <p:cNvPr id="7" name="본문"/>
           <p:cNvSpPr txBox="1"/>
           <p:nvPr/>
         </p:nvSpPr>
         <p:spPr>
           <a:xfrm>
-            <a:off x="731520" y="3154680"/>
-            <a:ext cx="5394960" cy="2651760"/>
+            <a:off x="640080" y="3337560"/>
+            <a:ext cx="5577840" cy="2651760"/>
           </a:xfrm>
           <a:prstGeom prst="rect">
             <a:avLst/>
@@ -4431,7 +4846,7 @@
             <a:r>
               <a:rPr sz="2800" b="0" i="0">
                 <a:solidFill>
-                  <a:srgbClr val="2B2B2B"/>
+                  <a:srgbClr val="26231F"/>
                 </a:solidFill>
               </a:rPr>
               <a:t>미룬 일은 내일 해도 돼요. 오늘은 불을 일찍 끄세요.</a:t>
@@ -4441,14 +4856,14 @@
       </p:sp>
       <p:sp>
         <p:nvSpPr>
-          <p:cNvPr id="6" name="쪽 번호"/>
+          <p:cNvPr id="8" name="쪽 번호"/>
           <p:cNvSpPr txBox="1"/>
           <p:nvPr/>
         </p:nvSpPr>
         <p:spPr>
           <a:xfrm>
-            <a:off x="731520" y="5852159"/>
-            <a:ext cx="5394960" cy="365760"/>
+            <a:off x="640080" y="5989320"/>
+            <a:ext cx="5577840" cy="365760"/>
           </a:xfrm>
           <a:prstGeom prst="rect">
             <a:avLst/>
@@ -4488,6 +4903,14 @@
 <file path=ppt/slides/slide7.xml><?xml version="1.0" encoding="utf-8"?>
 <p:sld xmlns:a="http://schemas.openxmlformats.org/drawingml/2006/main" xmlns:p="http://schemas.openxmlformats.org/presentationml/2006/main" xmlns:r="http://schemas.openxmlformats.org/officeDocument/2006/relationships">
   <p:cSld>
+    <p:bg>
+      <p:bgPr>
+        <a:solidFill>
+          <a:srgbClr val="492738"/>
+        </a:solidFill>
+        <a:effectLst/>
+      </p:bgPr>
+    </p:bg>
     <p:spTree>
       <p:nvGrpSpPr>
         <p:cNvPr id="1" name=""/>
@@ -4495,30 +4918,102 @@
         <p:nvPr/>
       </p:nvGrpSpPr>
       <p:grpSpPr/>
-      <p:pic>
-        <p:nvPicPr>
-          <p:cNvPr id="3" name="표지 그림" descr="news-25.jpg"/>
-          <p:cNvPicPr>
-            <a:picLocks noChangeAspect="1"/>
-          </p:cNvPicPr>
+      <p:sp>
+        <p:nvSpPr>
+          <p:cNvPr id="3" name="장식"/>
+          <p:cNvSpPr/>
           <p:nvPr/>
-        </p:nvPicPr>
-        <p:blipFill>
-          <a:blip r:embed="rId2"/>
-          <a:stretch>
-            <a:fillRect/>
-          </a:stretch>
-        </p:blipFill>
-        <p:spPr>
-          <a:xfrm>
-            <a:off x="0" y="0"/>
-            <a:ext cx="6858000" cy="6858000"/>
+        </p:nvSpPr>
+        <p:spPr>
+          <a:xfrm>
+            <a:off x="1600200" y="822960"/>
+            <a:ext cx="3657600" cy="3657600"/>
+          </a:xfrm>
+          <a:prstGeom prst="ellipse">
+            <a:avLst/>
+          </a:prstGeom>
+          <a:solidFill>
+            <a:srgbClr val="EA7BB3"/>
+          </a:solidFill>
+          <a:ln>
+            <a:noFill/>
+          </a:ln>
+        </p:spPr>
+        <p:txBody>
+          <a:bodyPr rtlCol="0" anchor="ctr"/>
+          <a:lstStyle/>
+          <a:p>
+            <a:pPr algn="ctr"/>
+          </a:p>
+        </p:txBody>
+      </p:sp>
+      <p:sp>
+        <p:nvSpPr>
+          <p:cNvPr id="4" name="장식"/>
+          <p:cNvSpPr/>
+          <p:nvPr/>
+        </p:nvSpPr>
+        <p:spPr>
+          <a:xfrm>
+            <a:off x="3246120" y="502920"/>
+            <a:ext cx="822960" cy="822960"/>
+          </a:xfrm>
+          <a:prstGeom prst="ellipse">
+            <a:avLst/>
+          </a:prstGeom>
+          <a:solidFill>
+            <a:srgbClr val="B25E88"/>
+          </a:solidFill>
+          <a:ln>
+            <a:noFill/>
+          </a:ln>
+        </p:spPr>
+        <p:txBody>
+          <a:bodyPr rtlCol="0" anchor="ctr"/>
+          <a:lstStyle/>
+          <a:p>
+            <a:pPr algn="ctr"/>
+          </a:p>
+        </p:txBody>
+      </p:sp>
+      <p:sp>
+        <p:nvSpPr>
+          <p:cNvPr id="5" name="라벨"/>
+          <p:cNvSpPr txBox="1"/>
+          <p:nvPr/>
+        </p:nvSpPr>
+        <p:spPr>
+          <a:xfrm>
+            <a:off x="731520" y="4572000"/>
+            <a:ext cx="5394960" cy="274320"/>
           </a:xfrm>
           <a:prstGeom prst="rect">
             <a:avLst/>
           </a:prstGeom>
-        </p:spPr>
-      </p:pic>
+          <a:noFill/>
+        </p:spPr>
+        <p:txBody>
+          <a:bodyPr wrap="square" lIns="54864" rIns="54864" tIns="27432" bIns="27432" anchor="t">
+            <a:noAutofit/>
+          </a:bodyPr>
+          <a:lstStyle/>
+          <a:p>
+            <a:pPr algn="ctr">
+              <a:lnSpc>
+                <a:spcPct val="115000"/>
+              </a:lnSpc>
+            </a:pPr>
+            <a:r>
+              <a:rPr sz="1000" b="1" i="0" spc="250">
+                <a:solidFill>
+                  <a:srgbClr val="FFFFFF"/>
+                </a:solidFill>
+              </a:rPr>
+              <a:t>CARD NEWS</a:t>
+            </a:r>
+          </a:p>
+        </p:txBody>
+      </p:sp>
       <p:sp>
         <p:nvSpPr>
           <p:cNvPr id="2" name="Title 1"/>
@@ -4531,8 +5026,8 @@
         </p:nvSpPr>
         <p:spPr>
           <a:xfrm>
-            <a:off x="685800" y="960120"/>
-            <a:ext cx="5486400" cy="1463040"/>
+            <a:off x="731520" y="4892040"/>
+            <a:ext cx="5394960" cy="914400"/>
           </a:xfrm>
         </p:spPr>
         <p:txBody>
@@ -4541,7 +5036,7 @@
           </a:bodyPr>
           <a:lstStyle/>
           <a:p>
-            <a:pPr algn="l">
+            <a:pPr algn="ctr">
               <a:lnSpc>
                 <a:spcPct val="105000"/>
               </a:lnSpc>
@@ -4549,7 +5044,7 @@
             <a:r>
               <a:rPr sz="2800" b="1" i="0">
                 <a:solidFill>
-                  <a:srgbClr val="1F1268"/>
+                  <a:srgbClr val="FFFFFF"/>
                 </a:solidFill>
               </a:rPr>
               <a:t>저장해 두고 필요할 때 꺼내 보세요</a:t>
@@ -4559,14 +5054,14 @@
       </p:sp>
       <p:sp>
         <p:nvSpPr>
-          <p:cNvPr id="4" name="한 줄 문구"/>
+          <p:cNvPr id="6" name="한 줄 문구"/>
           <p:cNvSpPr txBox="1"/>
           <p:nvPr/>
         </p:nvSpPr>
         <p:spPr>
           <a:xfrm>
-            <a:off x="685800" y="2560320"/>
-            <a:ext cx="5486400" cy="822960"/>
+            <a:off x="731520" y="5806440"/>
+            <a:ext cx="5394960" cy="822960"/>
           </a:xfrm>
           <a:prstGeom prst="rect">
             <a:avLst/>
@@ -4579,15 +5074,15 @@
           </a:bodyPr>
           <a:lstStyle/>
           <a:p>
-            <a:pPr algn="l">
+            <a:pPr algn="ctr">
               <a:lnSpc>
                 <a:spcPct val="115000"/>
               </a:lnSpc>
             </a:pPr>
             <a:r>
-              <a:rPr sz="1500" b="0" i="1">
+              <a:rPr sz="1500" b="0" i="0">
                 <a:solidFill>
-                  <a:srgbClr val="1F1268"/>
+                  <a:srgbClr val="FFFFFF"/>
                 </a:solidFill>
               </a:rPr>
               <a:t>마음에 들면 공유해 주세요</a:t>
@@ -4597,14 +5092,14 @@
       </p:sp>
       <p:sp>
         <p:nvSpPr>
-          <p:cNvPr id="5" name="안내 문구"/>
+          <p:cNvPr id="7" name="안내 문구"/>
           <p:cNvSpPr txBox="1"/>
           <p:nvPr/>
         </p:nvSpPr>
         <p:spPr>
           <a:xfrm>
-            <a:off x="685800" y="3429000"/>
-            <a:ext cx="5486400" cy="914400"/>
+            <a:off x="731520" y="6675120"/>
+            <a:ext cx="5394960" cy="914400"/>
           </a:xfrm>
           <a:prstGeom prst="rect">
             <a:avLst/>
@@ -4617,7 +5112,7 @@
           </a:bodyPr>
           <a:lstStyle/>
           <a:p>
-            <a:pPr algn="l">
+            <a:pPr algn="ctr">
               <a:lnSpc>
                 <a:spcPct val="115000"/>
               </a:lnSpc>
@@ -4625,7 +5120,7 @@
             <a:r>
               <a:rPr sz="1200" b="0" i="0">
                 <a:solidFill>
-                  <a:srgbClr val="666666"/>
+                  <a:srgbClr val="FFFFFF"/>
                 </a:solidFill>
               </a:rPr>
               <a:t>이름 · 연락처를 입력하세요</a:t>
@@ -4652,34 +5147,34 @@
         <a:sysClr val="window" lastClr="FFFFFF"/>
       </a:lt1>
       <a:dk2>
-        <a:srgbClr val="1F1268"/>
+        <a:srgbClr val="492738"/>
       </a:dk2>
       <a:lt2>
-        <a:srgbClr val="F5F4FD"/>
+        <a:srgbClr val="FDEAF4"/>
       </a:lt2>
       <a:accent1>
-        <a:srgbClr val="563EE0"/>
+        <a:srgbClr val="EA7BB3"/>
       </a:accent1>
       <a:accent2>
-        <a:srgbClr val="1CA8C4"/>
+        <a:srgbClr val="EF9FA1"/>
       </a:accent2>
       <a:accent3>
-        <a:srgbClr val="1F1268"/>
+        <a:srgbClr val="492738"/>
       </a:accent3>
       <a:accent4>
-        <a:srgbClr val="DED9FC"/>
+        <a:srgbClr val="FAD1E6"/>
       </a:accent4>
       <a:accent5>
-        <a:srgbClr val="3973D2"/>
+        <a:srgbClr val="EC8DAA"/>
       </a:accent5>
       <a:accent6>
-        <a:srgbClr val="7971A4"/>
+        <a:srgbClr val="927D88"/>
       </a:accent6>
       <a:hlink>
-        <a:srgbClr val="563EE0"/>
+        <a:srgbClr val="EA7BB3"/>
       </a:hlink>
       <a:folHlink>
-        <a:srgbClr val="1F1268"/>
+        <a:srgbClr val="492738"/>
       </a:folHlink>
     </a:clrScheme>
     <a:fontScheme name="Office">
